--- a/stage1_classic_ml/03_logistic_regression/Lecture-3-Logistic-Regression.pptx
+++ b/stage1_classic_ml/03_logistic_regression/Lecture-3-Logistic-Regression.pptx
@@ -25,6 +25,8 @@
     <p:sldId id="267" r:id="rId23"/>
     <p:sldId id="268" r:id="rId24"/>
     <p:sldId id="269" r:id="rId25"/>
+    <p:sldId id="270" r:id="rId26"/>
+    <p:sldId id="271" r:id="rId27"/>
   </p:sldIdLst>
   <p:sldSz cx="12188825" cy="6858000"/>
   <p:notesSz cx="7010400" cy="9296400"/>
@@ -8395,12 +8397,12 @@
       <p:grpSpPr/>
       <p:sp>
         <p:nvSpPr>
-          <p:cNvPr id="2" name="Title 1"/>
+          <p:cNvPr id="2" name="Text Placeholder 1"/>
           <p:cNvSpPr>
             <a:spLocks noGrp="1"/>
           </p:cNvSpPr>
           <p:nvPr>
-            <p:ph type="title"/>
+            <p:ph type="body" idx="13" sz="quarter"/>
           </p:nvPr>
         </p:nvSpPr>
         <p:spPr/>
@@ -8409,19 +8411,24 @@
           <a:lstStyle/>
           <a:p>
             <a:r>
-              <a:t>Feature Coefficients — Interpretability</a:t>
+              <a:t>Predictions &amp;</a:t>
+            </a:r>
+          </a:p>
+          <a:p>
+            <a:r>
+              <a:t>Thresholds</a:t>
             </a:r>
           </a:p>
         </p:txBody>
       </p:sp>
       <p:sp>
         <p:nvSpPr>
-          <p:cNvPr id="3" name="Content Placeholder 2"/>
+          <p:cNvPr id="3" name="Text Placeholder 2"/>
           <p:cNvSpPr>
             <a:spLocks noGrp="1"/>
           </p:cNvSpPr>
           <p:nvPr>
-            <p:ph idx="1"/>
+            <p:ph type="body" idx="16" sz="quarter"/>
           </p:nvPr>
         </p:nvSpPr>
         <p:spPr/>
@@ -8429,51 +8436,8 @@
           <a:bodyPr/>
           <a:lstStyle/>
           <a:p>
-            <a:pPr/>
-            <a:r>
-              <a:t>model.coef_ tells you which features matter most</a:t>
-            </a:r>
-          </a:p>
-          <a:p>
-            <a:pPr lvl="1"/>
-            <a:r>
-              <a:t>Positive coefficient → increases P(phishing)</a:t>
-            </a:r>
-          </a:p>
-          <a:p>
-            <a:pPr lvl="1"/>
-            <a:r>
-              <a:t>Negative coefficient → decreases P(phishing)</a:t>
-            </a:r>
-          </a:p>
-          <a:p>
-            <a:pPr/>
-            <a:r>
-              <a:t>Example output:</a:t>
-            </a:r>
-          </a:p>
-          <a:p>
-            <a:pPr lvl="1"/>
-            <a:r>
-              <a:t>url_length: +0.82    (longer URLs → more suspicious)</a:t>
-            </a:r>
-          </a:p>
-          <a:p>
-            <a:pPr lvl="1"/>
-            <a:r>
-              <a:t>num_dots: +1.45       (many subdomains → highly suspicious)</a:t>
-            </a:r>
-          </a:p>
-          <a:p>
-            <a:pPr lvl="1"/>
-            <a:r>
-              <a:t>domain_age: -0.91    (older domains → more trustworthy)</a:t>
-            </a:r>
-          </a:p>
-          <a:p>
-            <a:pPr/>
-            <a:r>
-              <a:t>Great for explaining your detector to non-technical stakeholders</a:t>
+            <a:r>
+              <a:t>03</a:t>
             </a:r>
           </a:p>
         </p:txBody>
@@ -8498,12 +8462,12 @@
       <p:grpSpPr/>
       <p:sp>
         <p:nvSpPr>
-          <p:cNvPr id="2" name="Text Placeholder 1"/>
+          <p:cNvPr id="2" name="Title 1"/>
           <p:cNvSpPr>
             <a:spLocks noGrp="1"/>
           </p:cNvSpPr>
           <p:nvPr>
-            <p:ph type="body" idx="13" sz="quarter"/>
+            <p:ph type="title"/>
           </p:nvPr>
         </p:nvSpPr>
         <p:spPr/>
@@ -8512,32 +8476,35 @@
           <a:lstStyle/>
           <a:p>
             <a:r>
-              <a:t>Workshop</a:t>
+              <a:t>Two Ways to Get Predictions</a:t>
             </a:r>
           </a:p>
         </p:txBody>
       </p:sp>
-      <p:sp>
-        <p:nvSpPr>
-          <p:cNvPr id="3" name="Text Placeholder 2"/>
-          <p:cNvSpPr>
-            <a:spLocks noGrp="1"/>
-          </p:cNvSpPr>
-          <p:nvPr>
-            <p:ph type="body" idx="16" sz="quarter"/>
-          </p:nvPr>
-        </p:nvSpPr>
-        <p:spPr/>
-        <p:txBody>
-          <a:bodyPr/>
-          <a:lstStyle/>
-          <a:p>
-            <a:r>
-              <a:t>04</a:t>
-            </a:r>
-          </a:p>
-        </p:txBody>
-      </p:sp>
+      <p:pic>
+        <p:nvPicPr>
+          <p:cNvPr id="3" name="Picture 2" descr="log_predict.png"/>
+          <p:cNvPicPr>
+            <a:picLocks noChangeAspect="1"/>
+          </p:cNvPicPr>
+          <p:nvPr/>
+        </p:nvPicPr>
+        <p:blipFill>
+          <a:blip r:embed="rId2"/>
+          <a:stretch>
+            <a:fillRect/>
+          </a:stretch>
+        </p:blipFill>
+        <p:spPr>
+          <a:xfrm>
+            <a:off x="1097280" y="1645920"/>
+            <a:ext cx="10058400" cy="3332314"/>
+          </a:xfrm>
+          <a:prstGeom prst="rect">
+            <a:avLst/>
+          </a:prstGeom>
+        </p:spPr>
+      </p:pic>
     </p:spTree>
   </p:cSld>
   <p:clrMapOvr>
@@ -8572,75 +8539,35 @@
           <a:lstStyle/>
           <a:p>
             <a:r>
-              <a:t>Workshop — 4 Exercises</a:t>
+              <a:t>Threshold Tuning — Balancing Precision and Recall</a:t>
             </a:r>
           </a:p>
         </p:txBody>
       </p:sp>
-      <p:sp>
-        <p:nvSpPr>
-          <p:cNvPr id="3" name="Content Placeholder 2"/>
-          <p:cNvSpPr>
-            <a:spLocks noGrp="1"/>
-          </p:cNvSpPr>
-          <p:nvPr>
-            <p:ph idx="1"/>
-          </p:nvPr>
-        </p:nvSpPr>
-        <p:spPr/>
-        <p:txBody>
-          <a:bodyPr/>
-          <a:lstStyle/>
-          <a:p>
-            <a:pPr/>
-            <a:r>
-              <a:t>Exercise 1: From regression to classification — sigmoid, probability outputs</a:t>
-            </a:r>
-          </a:p>
-          <a:p>
-            <a:pPr/>
-            <a:r>
-              <a:t>Exercise 2: Feature engineering URLs — extract security-relevant features</a:t>
-            </a:r>
-          </a:p>
-          <a:p>
-            <a:pPr/>
-            <a:r>
-              <a:t>Exercise 3: Train and evaluate — LogisticRegression, classification report</a:t>
-            </a:r>
-          </a:p>
-          <a:p>
-            <a:pPr/>
-            <a:r>
-              <a:t>Exercise 4: Threshold tuning — predict_proba(), precision-recall tradeoff</a:t>
-            </a:r>
-          </a:p>
-          <a:p>
-            <a:pPr/>
-            <a:r>
-              <a:t>Each exercise has:</a:t>
-            </a:r>
-          </a:p>
-          <a:p>
-            <a:pPr lvl="1"/>
-            <a:r>
-              <a:t>lecture.md — concept explanation</a:t>
-            </a:r>
-          </a:p>
-          <a:p>
-            <a:pPr lvl="1"/>
-            <a:r>
-              <a:t>handson.md — step-by-step lab</a:t>
-            </a:r>
-          </a:p>
-          <a:p>
-            <a:pPr lvl="1"/>
-            <a:r>
-              <a:t>solution_logistic_regression.py — reference implementation</a:t>
-            </a:r>
-          </a:p>
-        </p:txBody>
-      </p:sp>
+      <p:pic>
+        <p:nvPicPr>
+          <p:cNvPr id="3" name="Picture 2" descr="log_threshold.png"/>
+          <p:cNvPicPr>
+            <a:picLocks noChangeAspect="1"/>
+          </p:cNvPicPr>
+          <p:nvPr/>
+        </p:nvPicPr>
+        <p:blipFill>
+          <a:blip r:embed="rId2"/>
+          <a:stretch>
+            <a:fillRect/>
+          </a:stretch>
+        </p:blipFill>
+        <p:spPr>
+          <a:xfrm>
+            <a:off x="914400" y="1371600"/>
+            <a:ext cx="10332720" cy="4133088"/>
+          </a:xfrm>
+          <a:prstGeom prst="rect">
+            <a:avLst/>
+          </a:prstGeom>
+        </p:spPr>
+      </p:pic>
     </p:spTree>
   </p:cSld>
   <p:clrMapOvr>
@@ -8666,7 +8593,7 @@
             <a:spLocks noGrp="1"/>
           </p:cNvSpPr>
           <p:nvPr>
-            <p:ph type="body" idx="12" sz="quarter"/>
+            <p:ph type="body" idx="13" sz="quarter"/>
           </p:nvPr>
         </p:nvSpPr>
         <p:spPr/>
@@ -8674,51 +8601,20 @@
           <a:bodyPr/>
           <a:lstStyle/>
           <a:p>
-            <a:pPr/>
-            <a:r>
-              <a:t>Logistic regression predicts a probability, then applies a threshold for a binary decision</a:t>
-            </a:r>
-          </a:p>
-          <a:p>
-            <a:pPr/>
-            <a:r>
-              <a:t>The sigmoid function maps any value to [0, 1]</a:t>
-            </a:r>
-          </a:p>
-          <a:p>
-            <a:pPr/>
-            <a:r>
-              <a:t>Phishing detection: extract URL features → train classifier → get probabilities</a:t>
-            </a:r>
-          </a:p>
-          <a:p>
-            <a:pPr/>
-            <a:r>
-              <a:t>Feature coefficients tell you which features drive the prediction</a:t>
-            </a:r>
-          </a:p>
-          <a:p>
-            <a:pPr/>
-            <a:r>
-              <a:t>Threshold tuning lets you balance precision vs recall for your use case</a:t>
-            </a:r>
-          </a:p>
-          <a:p>
-            <a:pPr/>
-            <a:r>
-              <a:t>Next: Lesson 1.4 — Decision Trees</a:t>
+            <a:r>
+              <a:t>Workshop</a:t>
             </a:r>
           </a:p>
         </p:txBody>
       </p:sp>
       <p:sp>
         <p:nvSpPr>
-          <p:cNvPr id="3" name="Title 2"/>
+          <p:cNvPr id="3" name="Text Placeholder 2"/>
           <p:cNvSpPr>
             <a:spLocks noGrp="1"/>
           </p:cNvSpPr>
           <p:nvPr>
-            <p:ph type="title"/>
+            <p:ph type="body" idx="16" sz="quarter"/>
           </p:nvPr>
         </p:nvSpPr>
         <p:spPr/>
@@ -8727,7 +8623,7 @@
           <a:lstStyle/>
           <a:p>
             <a:r>
-              <a:t>Summary</a:t>
+              <a:t>04</a:t>
             </a:r>
           </a:p>
         </p:txBody>
@@ -8752,6 +8648,191 @@
       <p:grpSpPr/>
       <p:sp>
         <p:nvSpPr>
+          <p:cNvPr id="2" name="Title 1"/>
+          <p:cNvSpPr>
+            <a:spLocks noGrp="1"/>
+          </p:cNvSpPr>
+          <p:nvPr>
+            <p:ph type="title"/>
+          </p:nvPr>
+        </p:nvSpPr>
+        <p:spPr/>
+        <p:txBody>
+          <a:bodyPr/>
+          <a:lstStyle/>
+          <a:p>
+            <a:r>
+              <a:t>Workshop — 4 Exercises</a:t>
+            </a:r>
+          </a:p>
+        </p:txBody>
+      </p:sp>
+      <p:sp>
+        <p:nvSpPr>
+          <p:cNvPr id="3" name="Content Placeholder 2"/>
+          <p:cNvSpPr>
+            <a:spLocks noGrp="1"/>
+          </p:cNvSpPr>
+          <p:nvPr>
+            <p:ph idx="1"/>
+          </p:nvPr>
+        </p:nvSpPr>
+        <p:spPr/>
+        <p:txBody>
+          <a:bodyPr/>
+          <a:lstStyle/>
+          <a:p>
+            <a:pPr/>
+            <a:r>
+              <a:t>Exercise 1: From regression to classification — sigmoid, probability outputs</a:t>
+            </a:r>
+          </a:p>
+          <a:p>
+            <a:pPr/>
+            <a:r>
+              <a:t>Exercise 2: Feature engineering URLs — extract security-relevant features</a:t>
+            </a:r>
+          </a:p>
+          <a:p>
+            <a:pPr/>
+            <a:r>
+              <a:t>Exercise 3: Train and evaluate — LogisticRegression, classification report, confusion matrix</a:t>
+            </a:r>
+          </a:p>
+          <a:p>
+            <a:pPr/>
+            <a:r>
+              <a:t>Exercise 4: Threshold tuning — predict_proba(), precision-recall tradeoff</a:t>
+            </a:r>
+          </a:p>
+          <a:p>
+            <a:pPr/>
+          </a:p>
+          <a:p>
+            <a:pPr/>
+            <a:r>
+              <a:t>Each exercise: lecture.md → handson.md → solution_logistic_regression.py</a:t>
+            </a:r>
+          </a:p>
+        </p:txBody>
+      </p:sp>
+    </p:spTree>
+  </p:cSld>
+  <p:clrMapOvr>
+    <a:masterClrMapping/>
+  </p:clrMapOvr>
+</p:sld>
+</file>
+
+<file path=ppt/slides/slide15.xml><?xml version="1.0" encoding="utf-8"?>
+<p:sld xmlns:a="http://schemas.openxmlformats.org/drawingml/2006/main" xmlns:p="http://schemas.openxmlformats.org/presentationml/2006/main" xmlns:r="http://schemas.openxmlformats.org/officeDocument/2006/relationships">
+  <p:cSld>
+    <p:spTree>
+      <p:nvGrpSpPr>
+        <p:cNvPr id="1" name=""/>
+        <p:cNvGrpSpPr/>
+        <p:nvPr/>
+      </p:nvGrpSpPr>
+      <p:grpSpPr/>
+      <p:sp>
+        <p:nvSpPr>
+          <p:cNvPr id="2" name="Text Placeholder 1"/>
+          <p:cNvSpPr>
+            <a:spLocks noGrp="1"/>
+          </p:cNvSpPr>
+          <p:nvPr>
+            <p:ph type="body" idx="12" sz="quarter"/>
+          </p:nvPr>
+        </p:nvSpPr>
+        <p:spPr/>
+        <p:txBody>
+          <a:bodyPr/>
+          <a:lstStyle/>
+          <a:p>
+            <a:pPr/>
+            <a:r>
+              <a:t>Logistic regression predicts a probability, then applies a threshold for a binary decision</a:t>
+            </a:r>
+          </a:p>
+          <a:p>
+            <a:pPr/>
+            <a:r>
+              <a:t>The sigmoid function maps any value to [0, 1]</a:t>
+            </a:r>
+          </a:p>
+          <a:p>
+            <a:pPr/>
+            <a:r>
+              <a:t>Phishing detection: extract URL features → train classifier → get probabilities</a:t>
+            </a:r>
+          </a:p>
+          <a:p>
+            <a:pPr/>
+            <a:r>
+              <a:t>Feature coefficients tell you which features drive the prediction — interpretable</a:t>
+            </a:r>
+          </a:p>
+          <a:p>
+            <a:pPr/>
+            <a:r>
+              <a:t>predict_proba() gives more control than predict() — always prefer it in security</a:t>
+            </a:r>
+          </a:p>
+          <a:p>
+            <a:pPr/>
+            <a:r>
+              <a:t>Threshold tuning: lower = catch more (more false alarms), higher = fewer alarms (miss some)</a:t>
+            </a:r>
+          </a:p>
+          <a:p>
+            <a:pPr/>
+            <a:r>
+              <a:t>Next: Lesson 1.4 — Decision Trees</a:t>
+            </a:r>
+          </a:p>
+        </p:txBody>
+      </p:sp>
+      <p:sp>
+        <p:nvSpPr>
+          <p:cNvPr id="3" name="Title 2"/>
+          <p:cNvSpPr>
+            <a:spLocks noGrp="1"/>
+          </p:cNvSpPr>
+          <p:nvPr>
+            <p:ph type="title"/>
+          </p:nvPr>
+        </p:nvSpPr>
+        <p:spPr/>
+        <p:txBody>
+          <a:bodyPr/>
+          <a:lstStyle/>
+          <a:p>
+            <a:r>
+              <a:t>Summary</a:t>
+            </a:r>
+          </a:p>
+        </p:txBody>
+      </p:sp>
+    </p:spTree>
+  </p:cSld>
+  <p:clrMapOvr>
+    <a:masterClrMapping/>
+  </p:clrMapOvr>
+</p:sld>
+</file>
+
+<file path=ppt/slides/slide16.xml><?xml version="1.0" encoding="utf-8"?>
+<p:sld xmlns:a="http://schemas.openxmlformats.org/drawingml/2006/main" xmlns:p="http://schemas.openxmlformats.org/presentationml/2006/main" xmlns:r="http://schemas.openxmlformats.org/officeDocument/2006/relationships">
+  <p:cSld>
+    <p:spTree>
+      <p:nvGrpSpPr>
+        <p:cNvPr id="1" name=""/>
+        <p:cNvGrpSpPr/>
+        <p:nvPr/>
+      </p:nvGrpSpPr>
+      <p:grpSpPr/>
+      <p:sp>
+        <p:nvSpPr>
           <p:cNvPr id="2" name="Text Placeholder 1"/>
           <p:cNvSpPr>
             <a:spLocks noGrp="1"/>
@@ -8827,31 +8908,37 @@
           <a:p>
             <a:pPr/>
             <a:r>
-              <a:t>From regression to classification</a:t>
+              <a:t>From regression to classification — the sigmoid function</a:t>
             </a:r>
           </a:p>
           <a:p>
             <a:pPr/>
             <a:r>
-              <a:t>The sigmoid function and probability</a:t>
+              <a:t>Real-life example: phishing URL detector</a:t>
             </a:r>
           </a:p>
           <a:p>
             <a:pPr/>
             <a:r>
-              <a:t>Real-life example: phishing URL detector</a:t>
+              <a:t>Feature coefficients — what matters most</a:t>
             </a:r>
           </a:p>
           <a:p>
             <a:pPr/>
             <a:r>
+              <a:t>predict() vs predict_proba() — hard labels vs probabilities</a:t>
+            </a:r>
+          </a:p>
+          <a:p>
+            <a:pPr/>
+            <a:r>
               <a:t>Decision boundaries and thresholds</a:t>
             </a:r>
           </a:p>
           <a:p>
             <a:pPr/>
             <a:r>
-              <a:t>Feature coefficients — what matters most</a:t>
+              <a:t>Threshold tuning for operational priorities</a:t>
             </a:r>
           </a:p>
           <a:p>
@@ -8994,7 +9081,7 @@
             <a:spLocks noGrp="1"/>
           </p:cNvSpPr>
           <p:nvPr>
-            <p:ph idx="1"/>
+            <p:ph idx="2" sz="half"/>
           </p:nvPr>
         </p:nvSpPr>
         <p:spPr/>
@@ -9004,43 +9091,89 @@
           <a:p>
             <a:pPr/>
             <a:r>
-              <a:t>Linear regression predicts a number (response time in ms)</a:t>
+              <a:t>Linear Regression (Lesson 1.2)</a:t>
             </a:r>
           </a:p>
           <a:p>
             <a:pPr/>
-            <a:r>
-              <a:t>Logistic regression predicts a probability → then a binary decision</a:t>
-            </a:r>
           </a:p>
           <a:p>
             <a:pPr/>
             <a:r>
-              <a:t>P(phishing) = sigmoid( w1×url_length + w2×num_dots + ... + bias )</a:t>
+              <a:t>Predicts a number:</a:t>
+            </a:r>
+          </a:p>
+          <a:p>
+            <a:pPr lvl="1"/>
+            <a:r>
+              <a:t>response_time = 247.3 ms</a:t>
             </a:r>
           </a:p>
           <a:p>
             <a:pPr/>
-            <a:r>
-              <a:t>The sigmoid function squashes any number into [0, 1]</a:t>
+          </a:p>
+          <a:p>
+            <a:pPr/>
+            <a:r>
+              <a:t>Output is continuous</a:t>
+            </a:r>
+          </a:p>
+          <a:p>
+            <a:pPr/>
+            <a:r>
+              <a:t>Can be any value</a:t>
+            </a:r>
+          </a:p>
+        </p:txBody>
+      </p:sp>
+      <p:sp>
+        <p:nvSpPr>
+          <p:cNvPr id="4" name="Content Placeholder 3"/>
+          <p:cNvSpPr>
+            <a:spLocks noGrp="1"/>
+          </p:cNvSpPr>
+          <p:nvPr>
+            <p:ph idx="12" sz="half"/>
+          </p:nvPr>
+        </p:nvSpPr>
+        <p:spPr/>
+        <p:txBody>
+          <a:bodyPr/>
+          <a:lstStyle/>
+          <a:p>
+            <a:pPr/>
+            <a:r>
+              <a:t>Logistic Regression (this lesson)</a:t>
+            </a:r>
+          </a:p>
+          <a:p>
+            <a:pPr/>
+          </a:p>
+          <a:p>
+            <a:pPr/>
+            <a:r>
+              <a:t>Predicts a probability:</a:t>
             </a:r>
           </a:p>
           <a:p>
             <a:pPr lvl="1"/>
             <a:r>
-              <a:t>sigmoid(x) = 1 / (1 + e^(-x))</a:t>
+              <a:t>P(phishing) = 0.87</a:t>
             </a:r>
           </a:p>
           <a:p>
             <a:pPr/>
-            <a:r>
-              <a:t>If P(phishing) &gt; 0.5 → classify as phishing</a:t>
-            </a:r>
           </a:p>
           <a:p>
             <a:pPr/>
             <a:r>
-              <a:t>The 0.5 threshold is not always the right choice (more on this later)</a:t>
+              <a:t>Then applies a threshold:</a:t>
+            </a:r>
+          </a:p>
+          <a:p>
+            <a:pPr/>
+            <a:r>
+              <a:t>If P &gt; 0.5 → classify as phishing</a:t>
             </a:r>
           </a:p>
         </p:txBody>
@@ -9065,12 +9198,12 @@
       <p:grpSpPr/>
       <p:sp>
         <p:nvSpPr>
-          <p:cNvPr id="2" name="Text Placeholder 1"/>
+          <p:cNvPr id="2" name="Title 1"/>
           <p:cNvSpPr>
             <a:spLocks noGrp="1"/>
           </p:cNvSpPr>
           <p:nvPr>
-            <p:ph type="body" idx="13" sz="quarter"/>
+            <p:ph type="title"/>
           </p:nvPr>
         </p:nvSpPr>
         <p:spPr/>
@@ -9079,37 +9212,35 @@
           <a:lstStyle/>
           <a:p>
             <a:r>
-              <a:t>Phishing URL</a:t>
-            </a:r>
-          </a:p>
-          <a:p>
-            <a:r>
-              <a:t>Detection</a:t>
+              <a:t>The Sigmoid Function</a:t>
             </a:r>
           </a:p>
         </p:txBody>
       </p:sp>
-      <p:sp>
-        <p:nvSpPr>
-          <p:cNvPr id="3" name="Text Placeholder 2"/>
-          <p:cNvSpPr>
-            <a:spLocks noGrp="1"/>
-          </p:cNvSpPr>
-          <p:nvPr>
-            <p:ph type="body" idx="16" sz="quarter"/>
-          </p:nvPr>
-        </p:nvSpPr>
-        <p:spPr/>
-        <p:txBody>
-          <a:bodyPr/>
-          <a:lstStyle/>
-          <a:p>
-            <a:r>
-              <a:t>02</a:t>
-            </a:r>
-          </a:p>
-        </p:txBody>
-      </p:sp>
+      <p:pic>
+        <p:nvPicPr>
+          <p:cNvPr id="3" name="Picture 2" descr="log_sigmoid.png"/>
+          <p:cNvPicPr>
+            <a:picLocks noChangeAspect="1"/>
+          </p:cNvPicPr>
+          <p:nvPr/>
+        </p:nvPicPr>
+        <p:blipFill>
+          <a:blip r:embed="rId2"/>
+          <a:stretch>
+            <a:fillRect/>
+          </a:stretch>
+        </p:blipFill>
+        <p:spPr>
+          <a:xfrm>
+            <a:off x="2011680" y="1371600"/>
+            <a:ext cx="8229600" cy="5052889"/>
+          </a:xfrm>
+          <a:prstGeom prst="rect">
+            <a:avLst/>
+          </a:prstGeom>
+        </p:spPr>
+      </p:pic>
     </p:spTree>
   </p:cSld>
   <p:clrMapOvr>
@@ -9130,12 +9261,12 @@
       <p:grpSpPr/>
       <p:sp>
         <p:nvSpPr>
-          <p:cNvPr id="2" name="Title 1"/>
+          <p:cNvPr id="2" name="Text Placeholder 1"/>
           <p:cNvSpPr>
             <a:spLocks noGrp="1"/>
           </p:cNvSpPr>
           <p:nvPr>
-            <p:ph type="title"/>
+            <p:ph type="body" idx="13" sz="quarter"/>
           </p:nvPr>
         </p:nvSpPr>
         <p:spPr/>
@@ -9144,19 +9275,24 @@
           <a:lstStyle/>
           <a:p>
             <a:r>
-              <a:t>Real-Life Example: Phishing URL Detector</a:t>
+              <a:t>Phishing URL</a:t>
+            </a:r>
+          </a:p>
+          <a:p>
+            <a:r>
+              <a:t>Detection</a:t>
             </a:r>
           </a:p>
         </p:txBody>
       </p:sp>
       <p:sp>
         <p:nvSpPr>
-          <p:cNvPr id="3" name="Content Placeholder 2"/>
+          <p:cNvPr id="3" name="Text Placeholder 2"/>
           <p:cNvSpPr>
             <a:spLocks noGrp="1"/>
           </p:cNvSpPr>
           <p:nvPr>
-            <p:ph idx="1"/>
+            <p:ph type="body" idx="16" sz="quarter"/>
           </p:nvPr>
         </p:nvSpPr>
         <p:spPr/>
@@ -9164,51 +9300,8 @@
           <a:bodyPr/>
           <a:lstStyle/>
           <a:p>
-            <a:pPr/>
-            <a:r>
-              <a:t>A phishing URL often has telltale signs:</a:t>
-            </a:r>
-          </a:p>
-          <a:p>
-            <a:pPr lvl="1"/>
-            <a:r>
-              <a:t>Very long URL — to hide the real domain in the path</a:t>
-            </a:r>
-          </a:p>
-          <a:p>
-            <a:pPr lvl="1"/>
-            <a:r>
-              <a:t>Many dots — paypal.verify.account.evil.com</a:t>
-            </a:r>
-          </a:p>
-          <a:p>
-            <a:pPr lvl="1"/>
-            <a:r>
-              <a:t>Contains @ symbol — browser ignores everything before @</a:t>
-            </a:r>
-          </a:p>
-          <a:p>
-            <a:pPr lvl="1"/>
-            <a:r>
-              <a:t>Uses an IP address instead of a domain name</a:t>
-            </a:r>
-          </a:p>
-          <a:p>
-            <a:pPr lvl="1"/>
-            <a:r>
-              <a:t>Many hyphens in the domain</a:t>
-            </a:r>
-          </a:p>
-          <a:p>
-            <a:pPr/>
-            <a:r>
-              <a:t>We extract these as numerical features and train a classifier</a:t>
-            </a:r>
-          </a:p>
-          <a:p>
-            <a:pPr/>
-            <a:r>
-              <a:t>Label: phishing (1) or legitimate (0)</a:t>
+            <a:r>
+              <a:t>02</a:t>
             </a:r>
           </a:p>
         </p:txBody>
@@ -9247,69 +9340,35 @@
           <a:lstStyle/>
           <a:p>
             <a:r>
-              <a:t>Decision Boundary</a:t>
+              <a:t>Phishing URL Red Flags — Extractable as Features</a:t>
             </a:r>
           </a:p>
         </p:txBody>
       </p:sp>
-      <p:sp>
-        <p:nvSpPr>
-          <p:cNvPr id="3" name="Content Placeholder 2"/>
-          <p:cNvSpPr>
-            <a:spLocks noGrp="1"/>
-          </p:cNvSpPr>
-          <p:nvPr>
-            <p:ph idx="1"/>
-          </p:nvPr>
-        </p:nvSpPr>
-        <p:spPr/>
-        <p:txBody>
-          <a:bodyPr/>
-          <a:lstStyle/>
-          <a:p>
-            <a:pPr/>
-            <a:r>
-              <a:t>The model learns a boundary that separates the two classes</a:t>
-            </a:r>
-          </a:p>
-          <a:p>
-            <a:pPr/>
-            <a:r>
-              <a:t>In 2D: a line. In many dimensions: a hyperplane</a:t>
-            </a:r>
-          </a:p>
-          <a:p>
-            <a:pPr/>
-            <a:r>
-              <a:t>Everything on one side → phishing, the other → legitimate</a:t>
-            </a:r>
-          </a:p>
-          <a:p>
-            <a:pPr/>
-            <a:r>
-              <a:t>Two ways to get predictions:</a:t>
-            </a:r>
-          </a:p>
-          <a:p>
-            <a:pPr lvl="1"/>
-            <a:r>
-              <a:t>model.predict(X) — returns 0 or 1 (hard label, uses 0.5 threshold)</a:t>
-            </a:r>
-          </a:p>
-          <a:p>
-            <a:pPr lvl="1"/>
-            <a:r>
-              <a:t>model.predict_proba(X) — returns [P(legit), P(phishing)]</a:t>
-            </a:r>
-          </a:p>
-          <a:p>
-            <a:pPr/>
-            <a:r>
-              <a:t>Probabilities give you more control than hard labels</a:t>
-            </a:r>
-          </a:p>
-        </p:txBody>
-      </p:sp>
+      <p:pic>
+        <p:nvPicPr>
+          <p:cNvPr id="3" name="Picture 2" descr="log_features.png"/>
+          <p:cNvPicPr>
+            <a:picLocks noChangeAspect="1"/>
+          </p:cNvPicPr>
+          <p:nvPr/>
+        </p:nvPicPr>
+        <p:blipFill>
+          <a:blip r:embed="rId2"/>
+          <a:stretch>
+            <a:fillRect/>
+          </a:stretch>
+        </p:blipFill>
+        <p:spPr>
+          <a:xfrm>
+            <a:off x="1097280" y="1188720"/>
+            <a:ext cx="10058400" cy="5577687"/>
+          </a:xfrm>
+          <a:prstGeom prst="rect">
+            <a:avLst/>
+          </a:prstGeom>
+        </p:spPr>
+      </p:pic>
     </p:spTree>
   </p:cSld>
   <p:clrMapOvr>
@@ -9330,12 +9389,12 @@
       <p:grpSpPr/>
       <p:sp>
         <p:nvSpPr>
-          <p:cNvPr id="2" name="Text Placeholder 1"/>
+          <p:cNvPr id="2" name="Title 1"/>
           <p:cNvSpPr>
             <a:spLocks noGrp="1"/>
           </p:cNvSpPr>
           <p:nvPr>
-            <p:ph type="body" idx="13" sz="quarter"/>
+            <p:ph type="title"/>
           </p:nvPr>
         </p:nvSpPr>
         <p:spPr/>
@@ -9344,37 +9403,35 @@
           <a:lstStyle/>
           <a:p>
             <a:r>
-              <a:t>Thresholds &amp;</a:t>
-            </a:r>
-          </a:p>
-          <a:p>
-            <a:r>
-              <a:t>Coefficients</a:t>
+              <a:t>Feature Coefficients — What Drives the Prediction</a:t>
             </a:r>
           </a:p>
         </p:txBody>
       </p:sp>
-      <p:sp>
-        <p:nvSpPr>
-          <p:cNvPr id="3" name="Text Placeholder 2"/>
-          <p:cNvSpPr>
-            <a:spLocks noGrp="1"/>
-          </p:cNvSpPr>
-          <p:nvPr>
-            <p:ph type="body" idx="16" sz="quarter"/>
-          </p:nvPr>
-        </p:nvSpPr>
-        <p:spPr/>
-        <p:txBody>
-          <a:bodyPr/>
-          <a:lstStyle/>
-          <a:p>
-            <a:r>
-              <a:t>03</a:t>
-            </a:r>
-          </a:p>
-        </p:txBody>
-      </p:sp>
+      <p:pic>
+        <p:nvPicPr>
+          <p:cNvPr id="3" name="Picture 2" descr="log_coefs.png"/>
+          <p:cNvPicPr>
+            <a:picLocks noChangeAspect="1"/>
+          </p:cNvPicPr>
+          <p:nvPr/>
+        </p:nvPicPr>
+        <p:blipFill>
+          <a:blip r:embed="rId2"/>
+          <a:stretch>
+            <a:fillRect/>
+          </a:stretch>
+        </p:blipFill>
+        <p:spPr>
+          <a:xfrm>
+            <a:off x="2011680" y="1371600"/>
+            <a:ext cx="8229600" cy="7107964"/>
+          </a:xfrm>
+          <a:prstGeom prst="rect">
+            <a:avLst/>
+          </a:prstGeom>
+        </p:spPr>
+      </p:pic>
     </p:spTree>
   </p:cSld>
   <p:clrMapOvr>
@@ -9395,7 +9452,59 @@
       <p:grpSpPr/>
       <p:sp>
         <p:nvSpPr>
-          <p:cNvPr id="2" name="Title 1"/>
+          <p:cNvPr id="2" name="Text Placeholder 1"/>
+          <p:cNvSpPr>
+            <a:spLocks noGrp="1"/>
+          </p:cNvSpPr>
+          <p:nvPr>
+            <p:ph type="body" idx="14" sz="quarter"/>
+          </p:nvPr>
+        </p:nvSpPr>
+        <p:spPr/>
+        <p:txBody>
+          <a:bodyPr/>
+          <a:lstStyle/>
+          <a:p>
+            <a:r>
+              <a:t>— Interpretability matters in security</a:t>
+            </a:r>
+          </a:p>
+        </p:txBody>
+      </p:sp>
+      <p:sp>
+        <p:nvSpPr>
+          <p:cNvPr id="3" name="Text Placeholder 2"/>
+          <p:cNvSpPr>
+            <a:spLocks noGrp="1"/>
+          </p:cNvSpPr>
+          <p:nvPr>
+            <p:ph type="body" idx="15" sz="quarter"/>
+          </p:nvPr>
+        </p:nvSpPr>
+        <p:spPr/>
+        <p:txBody>
+          <a:bodyPr/>
+          <a:lstStyle/>
+          <a:p>
+            <a:r>
+              <a:t>You can explain to a</a:t>
+            </a:r>
+          </a:p>
+          <a:p>
+            <a:r>
+              <a:t>non-technical stakeholder</a:t>
+            </a:r>
+          </a:p>
+          <a:p>
+            <a:r>
+              <a:t>exactly why a URL was flagged.</a:t>
+            </a:r>
+          </a:p>
+        </p:txBody>
+      </p:sp>
+      <p:sp>
+        <p:nvSpPr>
+          <p:cNvPr id="4" name="Title 3"/>
           <p:cNvSpPr>
             <a:spLocks noGrp="1"/>
           </p:cNvSpPr>
@@ -9409,19 +9518,19 @@
           <a:lstStyle/>
           <a:p>
             <a:r>
-              <a:t>Threshold Tuning</a:t>
+              <a:t>Interpreting Coefficients</a:t>
             </a:r>
           </a:p>
         </p:txBody>
       </p:sp>
       <p:sp>
         <p:nvSpPr>
-          <p:cNvPr id="3" name="Content Placeholder 2"/>
+          <p:cNvPr id="5" name="Text Placeholder 4"/>
           <p:cNvSpPr>
             <a:spLocks noGrp="1"/>
           </p:cNvSpPr>
           <p:nvPr>
-            <p:ph idx="1"/>
+            <p:ph type="body" idx="16" sz="quarter"/>
           </p:nvPr>
         </p:nvSpPr>
         <p:spPr/>
@@ -9431,49 +9540,40 @@
           <a:p>
             <a:pPr/>
             <a:r>
-              <a:t>Default threshold: 0.5 — but this is not always optimal</a:t>
+              <a:t>model.coef_ shows feature impact:</a:t>
+            </a:r>
+          </a:p>
+          <a:p>
+            <a:pPr lvl="1"/>
+            <a:r>
+              <a:t>Positive → increases P(phishing)</a:t>
+            </a:r>
+          </a:p>
+          <a:p>
+            <a:pPr lvl="1"/>
+            <a:r>
+              <a:t>Negative → decreases P(phishing)</a:t>
             </a:r>
           </a:p>
           <a:p>
             <a:pPr/>
-            <a:r>
-              <a:t>Lower threshold (e.g. 0.3):</a:t>
+          </a:p>
+          <a:p>
+            <a:pPr/>
+            <a:r>
+              <a:t>Directly interpretable:</a:t>
             </a:r>
           </a:p>
           <a:p>
             <a:pPr lvl="1"/>
             <a:r>
-              <a:t>Catches more phishing (higher recall)</a:t>
+              <a:t>num_dots: +1.45 (highly suspicious)</a:t>
             </a:r>
           </a:p>
           <a:p>
             <a:pPr lvl="1"/>
             <a:r>
-              <a:t>Generates more false alarms (lower precision)</a:t>
-            </a:r>
-          </a:p>
-          <a:p>
-            <a:pPr/>
-            <a:r>
-              <a:t>Higher threshold (e.g. 0.7):</a:t>
-            </a:r>
-          </a:p>
-          <a:p>
-            <a:pPr lvl="1"/>
-            <a:r>
-              <a:t>Fewer false alarms (higher precision)</a:t>
-            </a:r>
-          </a:p>
-          <a:p>
-            <a:pPr lvl="1"/>
-            <a:r>
-              <a:t>Misses more subtle phishing (lower recall)</a:t>
-            </a:r>
-          </a:p>
-          <a:p>
-            <a:pPr/>
-            <a:r>
-              <a:t>The right choice depends on your operational priorities</a:t>
+              <a:t>domain_age: −0.91 (older = trustworthy)</a:t>
             </a:r>
           </a:p>
         </p:txBody>

--- a/stage1_classic_ml/03_logistic_regression/Lecture-3-Logistic-Regression.pptx
+++ b/stage1_classic_ml/03_logistic_regression/Lecture-3-Logistic-Regression.pptx
@@ -27,6 +27,10 @@
     <p:sldId id="269" r:id="rId25"/>
     <p:sldId id="270" r:id="rId26"/>
     <p:sldId id="271" r:id="rId27"/>
+    <p:sldId id="272" r:id="rId28"/>
+    <p:sldId id="273" r:id="rId29"/>
+    <p:sldId id="274" r:id="rId30"/>
+    <p:sldId id="275" r:id="rId31"/>
   </p:sldIdLst>
   <p:sldSz cx="12188825" cy="6858000"/>
   <p:notesSz cx="7010400" cy="9296400"/>
@@ -8330,7 +8334,7 @@
           <a:lstStyle/>
           <a:p>
             <a:r>
-              <a:t>Lesson 1.3 — Stage 1: Classic Machine Learning</a:t>
+              <a:t>Lesson 1.3  |  Stage 1: Classic Machine Learning</a:t>
             </a:r>
           </a:p>
         </p:txBody>
@@ -8372,7 +8376,7 @@
           <a:lstStyle/>
           <a:p>
             <a:r>
-              <a:t>For Security Professionals</a:t>
+              <a:t>From Numbers to Decisions  -  Building a Phishing Classifier</a:t>
             </a:r>
           </a:p>
         </p:txBody>
@@ -8397,12 +8401,12 @@
       <p:grpSpPr/>
       <p:sp>
         <p:nvSpPr>
-          <p:cNvPr id="2" name="Text Placeholder 1"/>
+          <p:cNvPr id="2" name="Title 1"/>
           <p:cNvSpPr>
             <a:spLocks noGrp="1"/>
           </p:cNvSpPr>
           <p:nvPr>
-            <p:ph type="body" idx="13" sz="quarter"/>
+            <p:ph type="title"/>
           </p:nvPr>
         </p:nvSpPr>
         <p:spPr/>
@@ -8411,24 +8415,19 @@
           <a:lstStyle/>
           <a:p>
             <a:r>
-              <a:t>Predictions &amp;</a:t>
-            </a:r>
-          </a:p>
-          <a:p>
-            <a:r>
-              <a:t>Thresholds</a:t>
-            </a:r>
-          </a:p>
-        </p:txBody>
-      </p:sp>
-      <p:sp>
-        <p:nvSpPr>
-          <p:cNvPr id="3" name="Text Placeholder 2"/>
+              <a:t>The Code - Familiar Pattern from Lesson 1.2</a:t>
+            </a:r>
+          </a:p>
+        </p:txBody>
+      </p:sp>
+      <p:sp>
+        <p:nvSpPr>
+          <p:cNvPr id="3" name="Content Placeholder 2"/>
           <p:cNvSpPr>
             <a:spLocks noGrp="1"/>
           </p:cNvSpPr>
           <p:nvPr>
-            <p:ph type="body" idx="16" sz="quarter"/>
+            <p:ph idx="1"/>
           </p:nvPr>
         </p:nvSpPr>
         <p:spPr/>
@@ -8437,7 +8436,62 @@
           <a:lstStyle/>
           <a:p>
             <a:r>
-              <a:t>03</a:t>
+              <a:rPr sz="1500"/>
+              <a:t>from sklearn.linear_model import LogisticRegression</a:t>
+            </a:r>
+          </a:p>
+          <a:p>
+            <a:r>
+              <a:rPr sz="1500"/>
+              <a:t>from sklearn.preprocessing import StandardScaler</a:t>
+            </a:r>
+          </a:p>
+          <a:p>
+            <a:r>
+              <a:rPr sz="1500"/>
+              <a:t/>
+            </a:r>
+          </a:p>
+          <a:p>
+            <a:r>
+              <a:rPr sz="1500"/>
+              <a:t>scaler = StandardScaler()</a:t>
+            </a:r>
+          </a:p>
+          <a:p>
+            <a:r>
+              <a:rPr sz="1500"/>
+              <a:t>X_train_scaled = scaler.fit_transform(X_train)</a:t>
+            </a:r>
+          </a:p>
+          <a:p>
+            <a:r>
+              <a:rPr sz="1500"/>
+              <a:t>X_test_scaled = scaler.transform(X_test)</a:t>
+            </a:r>
+          </a:p>
+          <a:p>
+            <a:r>
+              <a:rPr sz="1500"/>
+              <a:t/>
+            </a:r>
+          </a:p>
+          <a:p>
+            <a:r>
+              <a:rPr sz="1500"/>
+              <a:t>model = LogisticRegression()</a:t>
+            </a:r>
+          </a:p>
+          <a:p>
+            <a:r>
+              <a:rPr sz="1500"/>
+              <a:t>model.fit(X_train_scaled, y_train)</a:t>
+            </a:r>
+          </a:p>
+          <a:p>
+            <a:r>
+              <a:rPr sz="1500"/>
+              <a:t>y_pred = model.predict(X_test_scaled)</a:t>
             </a:r>
           </a:p>
         </p:txBody>
@@ -8476,14 +8530,14 @@
           <a:lstStyle/>
           <a:p>
             <a:r>
-              <a:t>Two Ways to Get Predictions</a:t>
+              <a:t>Feature Coefficients - What Drives the Prediction</a:t>
             </a:r>
           </a:p>
         </p:txBody>
       </p:sp>
       <p:pic>
         <p:nvPicPr>
-          <p:cNvPr id="3" name="Picture 2" descr="log_predict.png"/>
+          <p:cNvPr id="3" name="Picture 2" descr="coefficients.png"/>
           <p:cNvPicPr>
             <a:picLocks noChangeAspect="1"/>
           </p:cNvPicPr>
@@ -8497,8 +8551,8 @@
         </p:blipFill>
         <p:spPr>
           <a:xfrm>
-            <a:off x="1097280" y="1645920"/>
-            <a:ext cx="10058400" cy="3332314"/>
+            <a:off x="640080" y="1371600"/>
+            <a:ext cx="10972800" cy="4360912"/>
           </a:xfrm>
           <a:prstGeom prst="rect">
             <a:avLst/>
@@ -8525,7 +8579,80 @@
       <p:grpSpPr/>
       <p:sp>
         <p:nvSpPr>
-          <p:cNvPr id="2" name="Title 1"/>
+          <p:cNvPr id="2" name="Text Placeholder 1"/>
+          <p:cNvSpPr>
+            <a:spLocks noGrp="1"/>
+          </p:cNvSpPr>
+          <p:nvPr>
+            <p:ph type="body" idx="14" sz="quarter"/>
+          </p:nvPr>
+        </p:nvSpPr>
+        <p:spPr/>
+        <p:txBody>
+          <a:bodyPr/>
+          <a:lstStyle/>
+          <a:p>
+            <a:r>
+              <a:t/>
+            </a:r>
+          </a:p>
+        </p:txBody>
+      </p:sp>
+      <p:sp>
+        <p:nvSpPr>
+          <p:cNvPr id="3" name="Text Placeholder 2"/>
+          <p:cNvSpPr>
+            <a:spLocks noGrp="1"/>
+          </p:cNvSpPr>
+          <p:nvPr>
+            <p:ph type="body" idx="15" sz="quarter"/>
+          </p:nvPr>
+        </p:nvSpPr>
+        <p:spPr/>
+        <p:txBody>
+          <a:bodyPr/>
+          <a:lstStyle/>
+          <a:p>
+            <a:r>
+              <a:rPr sz="1400"/>
+              <a:t>In security, a model that</a:t>
+            </a:r>
+          </a:p>
+          <a:p>
+            <a:r>
+              <a:rPr sz="1400"/>
+              <a:t>cannot be explained will</a:t>
+            </a:r>
+          </a:p>
+          <a:p>
+            <a:r>
+              <a:rPr sz="1400"/>
+              <a:t>not be trusted.</a:t>
+            </a:r>
+          </a:p>
+          <a:p>
+            <a:r>
+              <a:rPr sz="1400"/>
+              <a:t/>
+            </a:r>
+          </a:p>
+          <a:p>
+            <a:r>
+              <a:rPr sz="1400"/>
+              <a:t>Logistic regression gives</a:t>
+            </a:r>
+          </a:p>
+          <a:p>
+            <a:r>
+              <a:rPr sz="1400"/>
+              <a:t>you built-in transparency.</a:t>
+            </a:r>
+          </a:p>
+        </p:txBody>
+      </p:sp>
+      <p:sp>
+        <p:nvSpPr>
+          <p:cNvPr id="4" name="Title 3"/>
           <p:cNvSpPr>
             <a:spLocks noGrp="1"/>
           </p:cNvSpPr>
@@ -8539,35 +8666,81 @@
           <a:lstStyle/>
           <a:p>
             <a:r>
-              <a:t>Threshold Tuning — Balancing Precision and Recall</a:t>
-            </a:r>
-          </a:p>
-        </p:txBody>
-      </p:sp>
-      <p:pic>
-        <p:nvPicPr>
-          <p:cNvPr id="3" name="Picture 2" descr="log_threshold.png"/>
-          <p:cNvPicPr>
-            <a:picLocks noChangeAspect="1"/>
-          </p:cNvPicPr>
-          <p:nvPr/>
-        </p:nvPicPr>
-        <p:blipFill>
-          <a:blip r:embed="rId2"/>
-          <a:stretch>
-            <a:fillRect/>
-          </a:stretch>
-        </p:blipFill>
-        <p:spPr>
-          <a:xfrm>
-            <a:off x="914400" y="1371600"/>
-            <a:ext cx="10332720" cy="4133088"/>
-          </a:xfrm>
-          <a:prstGeom prst="rect">
-            <a:avLst/>
-          </a:prstGeom>
-        </p:spPr>
-      </p:pic>
+              <a:t>Why Interpretability Matters</a:t>
+            </a:r>
+          </a:p>
+        </p:txBody>
+      </p:sp>
+      <p:sp>
+        <p:nvSpPr>
+          <p:cNvPr id="5" name="Text Placeholder 4"/>
+          <p:cNvSpPr>
+            <a:spLocks noGrp="1"/>
+          </p:cNvSpPr>
+          <p:nvPr>
+            <p:ph type="body" idx="16" sz="quarter"/>
+          </p:nvPr>
+        </p:nvSpPr>
+        <p:spPr/>
+        <p:txBody>
+          <a:bodyPr/>
+          <a:lstStyle/>
+          <a:p>
+            <a:r>
+              <a:rPr sz="1400"/>
+              <a:t>model.coef_ tells you:</a:t>
+            </a:r>
+          </a:p>
+          <a:p>
+            <a:r>
+              <a:rPr sz="1400"/>
+              <a:t>  which features increase risk</a:t>
+            </a:r>
+          </a:p>
+          <a:p>
+            <a:r>
+              <a:rPr sz="1400"/>
+              <a:t>  which features decrease risk</a:t>
+            </a:r>
+          </a:p>
+          <a:p>
+            <a:r>
+              <a:rPr sz="1400"/>
+              <a:t>  how much each one contributes</a:t>
+            </a:r>
+          </a:p>
+          <a:p>
+            <a:r>
+              <a:rPr sz="1400"/>
+              <a:t/>
+            </a:r>
+          </a:p>
+          <a:p>
+            <a:r>
+              <a:rPr sz="1400"/>
+              <a:t>You can explain to stakeholders:</a:t>
+            </a:r>
+          </a:p>
+          <a:p>
+            <a:r>
+              <a:rPr sz="1400"/>
+              <a:t>  'This URL was flagged because</a:t>
+            </a:r>
+          </a:p>
+          <a:p>
+            <a:r>
+              <a:rPr sz="1400"/>
+              <a:t>  it has 5 dots, uses an IP address,</a:t>
+            </a:r>
+          </a:p>
+          <a:p>
+            <a:r>
+              <a:rPr sz="1400"/>
+              <a:t>  and contains an @ symbol.'</a:t>
+            </a:r>
+          </a:p>
+        </p:txBody>
+      </p:sp>
     </p:spTree>
   </p:cSld>
   <p:clrMapOvr>
@@ -8602,7 +8775,12 @@
           <a:lstStyle/>
           <a:p>
             <a:r>
-              <a:t>Workshop</a:t>
+              <a:t>Probabilities</a:t>
+            </a:r>
+          </a:p>
+          <a:p>
+            <a:r>
+              <a:t>and Thresholds</a:t>
             </a:r>
           </a:p>
         </p:txBody>
@@ -8662,60 +8840,35 @@
           <a:lstStyle/>
           <a:p>
             <a:r>
-              <a:t>Workshop — 4 Exercises</a:t>
-            </a:r>
-          </a:p>
-        </p:txBody>
-      </p:sp>
-      <p:sp>
-        <p:nvSpPr>
-          <p:cNvPr id="3" name="Content Placeholder 2"/>
-          <p:cNvSpPr>
-            <a:spLocks noGrp="1"/>
-          </p:cNvSpPr>
-          <p:nvPr>
-            <p:ph idx="1"/>
-          </p:nvPr>
-        </p:nvSpPr>
-        <p:spPr/>
-        <p:txBody>
-          <a:bodyPr/>
-          <a:lstStyle/>
-          <a:p>
-            <a:pPr/>
-            <a:r>
-              <a:t>Exercise 1: From regression to classification — sigmoid, probability outputs</a:t>
-            </a:r>
-          </a:p>
-          <a:p>
-            <a:pPr/>
-            <a:r>
-              <a:t>Exercise 2: Feature engineering URLs — extract security-relevant features</a:t>
-            </a:r>
-          </a:p>
-          <a:p>
-            <a:pPr/>
-            <a:r>
-              <a:t>Exercise 3: Train and evaluate — LogisticRegression, classification report, confusion matrix</a:t>
-            </a:r>
-          </a:p>
-          <a:p>
-            <a:pPr/>
-            <a:r>
-              <a:t>Exercise 4: Threshold tuning — predict_proba(), precision-recall tradeoff</a:t>
-            </a:r>
-          </a:p>
-          <a:p>
-            <a:pPr/>
-          </a:p>
-          <a:p>
-            <a:pPr/>
-            <a:r>
-              <a:t>Each exercise: lecture.md → handson.md → solution_logistic_regression.py</a:t>
-            </a:r>
-          </a:p>
-        </p:txBody>
-      </p:sp>
+              <a:t>Two Ways to Get Predictions</a:t>
+            </a:r>
+          </a:p>
+        </p:txBody>
+      </p:sp>
+      <p:pic>
+        <p:nvPicPr>
+          <p:cNvPr id="3" name="Picture 2" descr="predict_vs_proba.png"/>
+          <p:cNvPicPr>
+            <a:picLocks noChangeAspect="1"/>
+          </p:cNvPicPr>
+          <p:nvPr/>
+        </p:nvPicPr>
+        <p:blipFill>
+          <a:blip r:embed="rId2"/>
+          <a:stretch>
+            <a:fillRect/>
+          </a:stretch>
+        </p:blipFill>
+        <p:spPr>
+          <a:xfrm>
+            <a:off x="457200" y="1371600"/>
+            <a:ext cx="11247120" cy="3650288"/>
+          </a:xfrm>
+          <a:prstGeom prst="rect">
+            <a:avLst/>
+          </a:prstGeom>
+        </p:spPr>
+      </p:pic>
     </p:spTree>
   </p:cSld>
   <p:clrMapOvr>
@@ -8736,65 +8889,7 @@
       <p:grpSpPr/>
       <p:sp>
         <p:nvSpPr>
-          <p:cNvPr id="2" name="Text Placeholder 1"/>
-          <p:cNvSpPr>
-            <a:spLocks noGrp="1"/>
-          </p:cNvSpPr>
-          <p:nvPr>
-            <p:ph type="body" idx="12" sz="quarter"/>
-          </p:nvPr>
-        </p:nvSpPr>
-        <p:spPr/>
-        <p:txBody>
-          <a:bodyPr/>
-          <a:lstStyle/>
-          <a:p>
-            <a:pPr/>
-            <a:r>
-              <a:t>Logistic regression predicts a probability, then applies a threshold for a binary decision</a:t>
-            </a:r>
-          </a:p>
-          <a:p>
-            <a:pPr/>
-            <a:r>
-              <a:t>The sigmoid function maps any value to [0, 1]</a:t>
-            </a:r>
-          </a:p>
-          <a:p>
-            <a:pPr/>
-            <a:r>
-              <a:t>Phishing detection: extract URL features → train classifier → get probabilities</a:t>
-            </a:r>
-          </a:p>
-          <a:p>
-            <a:pPr/>
-            <a:r>
-              <a:t>Feature coefficients tell you which features drive the prediction — interpretable</a:t>
-            </a:r>
-          </a:p>
-          <a:p>
-            <a:pPr/>
-            <a:r>
-              <a:t>predict_proba() gives more control than predict() — always prefer it in security</a:t>
-            </a:r>
-          </a:p>
-          <a:p>
-            <a:pPr/>
-            <a:r>
-              <a:t>Threshold tuning: lower = catch more (more false alarms), higher = fewer alarms (miss some)</a:t>
-            </a:r>
-          </a:p>
-          <a:p>
-            <a:pPr/>
-            <a:r>
-              <a:t>Next: Lesson 1.4 — Decision Trees</a:t>
-            </a:r>
-          </a:p>
-        </p:txBody>
-      </p:sp>
-      <p:sp>
-        <p:nvSpPr>
-          <p:cNvPr id="3" name="Title 2"/>
+          <p:cNvPr id="2" name="Title 1"/>
           <p:cNvSpPr>
             <a:spLocks noGrp="1"/>
           </p:cNvSpPr>
@@ -8808,11 +8903,35 @@
           <a:lstStyle/>
           <a:p>
             <a:r>
-              <a:t>Summary</a:t>
-            </a:r>
-          </a:p>
-        </p:txBody>
-      </p:sp>
+              <a:t>Tuning the Decision Threshold</a:t>
+            </a:r>
+          </a:p>
+        </p:txBody>
+      </p:sp>
+      <p:pic>
+        <p:nvPicPr>
+          <p:cNvPr id="3" name="Picture 2" descr="threshold.png"/>
+          <p:cNvPicPr>
+            <a:picLocks noChangeAspect="1"/>
+          </p:cNvPicPr>
+          <p:nvPr/>
+        </p:nvPicPr>
+        <p:blipFill>
+          <a:blip r:embed="rId2"/>
+          <a:stretch>
+            <a:fillRect/>
+          </a:stretch>
+        </p:blipFill>
+        <p:spPr>
+          <a:xfrm>
+            <a:off x="457200" y="1188720"/>
+            <a:ext cx="11247120" cy="4600373"/>
+          </a:xfrm>
+          <a:prstGeom prst="rect">
+            <a:avLst/>
+          </a:prstGeom>
+        </p:spPr>
+      </p:pic>
     </p:spTree>
   </p:cSld>
   <p:clrMapOvr>
@@ -8833,6 +8952,185 @@
       <p:grpSpPr/>
       <p:sp>
         <p:nvSpPr>
+          <p:cNvPr id="2" name="Title 1"/>
+          <p:cNvSpPr>
+            <a:spLocks noGrp="1"/>
+          </p:cNvSpPr>
+          <p:nvPr>
+            <p:ph type="title"/>
+          </p:nvPr>
+        </p:nvSpPr>
+        <p:spPr/>
+        <p:txBody>
+          <a:bodyPr/>
+          <a:lstStyle/>
+          <a:p>
+            <a:r>
+              <a:t>Choosing the Right Threshold</a:t>
+            </a:r>
+          </a:p>
+        </p:txBody>
+      </p:sp>
+      <p:sp>
+        <p:nvSpPr>
+          <p:cNvPr id="3" name="Content Placeholder 2"/>
+          <p:cNvSpPr>
+            <a:spLocks noGrp="1"/>
+          </p:cNvSpPr>
+          <p:nvPr>
+            <p:ph idx="2" sz="half"/>
+          </p:nvPr>
+        </p:nvSpPr>
+        <p:spPr/>
+        <p:txBody>
+          <a:bodyPr/>
+          <a:lstStyle/>
+          <a:p>
+            <a:r>
+              <a:rPr sz="1400"/>
+              <a:t>Lower threshold (e.g. 0.3)</a:t>
+            </a:r>
+          </a:p>
+          <a:p>
+            <a:r>
+              <a:rPr sz="1400"/>
+              <a:t/>
+            </a:r>
+          </a:p>
+          <a:p>
+            <a:r>
+              <a:rPr sz="1400"/>
+              <a:t>Catches more phishing URLs</a:t>
+            </a:r>
+          </a:p>
+          <a:p>
+            <a:r>
+              <a:rPr sz="1400"/>
+              <a:t>More false alarms</a:t>
+            </a:r>
+          </a:p>
+          <a:p>
+            <a:r>
+              <a:rPr sz="1400"/>
+              <a:t/>
+            </a:r>
+          </a:p>
+          <a:p>
+            <a:r>
+              <a:rPr sz="1400"/>
+              <a:t>Best when:</a:t>
+            </a:r>
+          </a:p>
+          <a:p>
+            <a:r>
+              <a:rPr sz="1400"/>
+              <a:t>  Missing an attack is costly</a:t>
+            </a:r>
+          </a:p>
+          <a:p>
+            <a:r>
+              <a:rPr sz="1400"/>
+              <a:t>  SOC team can handle volume</a:t>
+            </a:r>
+          </a:p>
+          <a:p>
+            <a:r>
+              <a:rPr sz="1400"/>
+              <a:t>  Alerting, not blocking</a:t>
+            </a:r>
+          </a:p>
+        </p:txBody>
+      </p:sp>
+      <p:sp>
+        <p:nvSpPr>
+          <p:cNvPr id="4" name="Content Placeholder 3"/>
+          <p:cNvSpPr>
+            <a:spLocks noGrp="1"/>
+          </p:cNvSpPr>
+          <p:nvPr>
+            <p:ph idx="12" sz="half"/>
+          </p:nvPr>
+        </p:nvSpPr>
+        <p:spPr/>
+        <p:txBody>
+          <a:bodyPr/>
+          <a:lstStyle/>
+          <a:p>
+            <a:r>
+              <a:rPr sz="1400"/>
+              <a:t>Higher threshold (e.g. 0.8)</a:t>
+            </a:r>
+          </a:p>
+          <a:p>
+            <a:r>
+              <a:rPr sz="1400"/>
+              <a:t/>
+            </a:r>
+          </a:p>
+          <a:p>
+            <a:r>
+              <a:rPr sz="1400"/>
+              <a:t>Fewer false alarms</a:t>
+            </a:r>
+          </a:p>
+          <a:p>
+            <a:r>
+              <a:rPr sz="1400"/>
+              <a:t>May miss some phishing</a:t>
+            </a:r>
+          </a:p>
+          <a:p>
+            <a:r>
+              <a:rPr sz="1400"/>
+              <a:t/>
+            </a:r>
+          </a:p>
+          <a:p>
+            <a:r>
+              <a:rPr sz="1400"/>
+              <a:t>Best when:</a:t>
+            </a:r>
+          </a:p>
+          <a:p>
+            <a:r>
+              <a:rPr sz="1400"/>
+              <a:t>  Auto-blocking URLs</a:t>
+            </a:r>
+          </a:p>
+          <a:p>
+            <a:r>
+              <a:rPr sz="1400"/>
+              <a:t>  Blocking legit = major cost</a:t>
+            </a:r>
+          </a:p>
+          <a:p>
+            <a:r>
+              <a:rPr sz="1400"/>
+              <a:t>  Small team, less capacity</a:t>
+            </a:r>
+          </a:p>
+        </p:txBody>
+      </p:sp>
+    </p:spTree>
+  </p:cSld>
+  <p:clrMapOvr>
+    <a:masterClrMapping/>
+  </p:clrMapOvr>
+</p:sld>
+</file>
+
+<file path=ppt/slides/slide17.xml><?xml version="1.0" encoding="utf-8"?>
+<p:sld xmlns:a="http://schemas.openxmlformats.org/drawingml/2006/main" xmlns:p="http://schemas.openxmlformats.org/presentationml/2006/main" xmlns:r="http://schemas.openxmlformats.org/officeDocument/2006/relationships">
+  <p:cSld>
+    <p:spTree>
+      <p:nvGrpSpPr>
+        <p:cNvPr id="1" name=""/>
+        <p:cNvGrpSpPr/>
+        <p:nvPr/>
+      </p:nvGrpSpPr>
+      <p:grpSpPr/>
+      <p:sp>
+        <p:nvSpPr>
           <p:cNvPr id="2" name="Text Placeholder 1"/>
           <p:cNvSpPr>
             <a:spLocks noGrp="1"/>
@@ -8847,7 +9145,12 @@
           <a:lstStyle/>
           <a:p>
             <a:r>
-              <a:t>Next → Lesson 1.4: Decision Trees</a:t>
+              <a:t>Workshop</a:t>
+            </a:r>
+          </a:p>
+          <a:p>
+            <a:r>
+              <a:t>and Next Steps</a:t>
             </a:r>
           </a:p>
         </p:txBody>
@@ -8859,7 +9162,7 @@
             <a:spLocks noGrp="1"/>
           </p:cNvSpPr>
           <p:nvPr>
-            <p:ph type="body" idx="14" sz="quarter"/>
+            <p:ph type="body" idx="16" sz="quarter"/>
           </p:nvPr>
         </p:nvSpPr>
         <p:spPr/>
@@ -8868,7 +9171,200 @@
           <a:lstStyle/>
           <a:p>
             <a:r>
-              <a:t>Logistic Regression</a:t>
+              <a:t>05</a:t>
+            </a:r>
+          </a:p>
+        </p:txBody>
+      </p:sp>
+    </p:spTree>
+  </p:cSld>
+  <p:clrMapOvr>
+    <a:masterClrMapping/>
+  </p:clrMapOvr>
+</p:sld>
+</file>
+
+<file path=ppt/slides/slide18.xml><?xml version="1.0" encoding="utf-8"?>
+<p:sld xmlns:a="http://schemas.openxmlformats.org/drawingml/2006/main" xmlns:p="http://schemas.openxmlformats.org/presentationml/2006/main" xmlns:r="http://schemas.openxmlformats.org/officeDocument/2006/relationships">
+  <p:cSld>
+    <p:spTree>
+      <p:nvGrpSpPr>
+        <p:cNvPr id="1" name=""/>
+        <p:cNvGrpSpPr/>
+        <p:nvPr/>
+      </p:nvGrpSpPr>
+      <p:grpSpPr/>
+      <p:sp>
+        <p:nvSpPr>
+          <p:cNvPr id="2" name="Title 1"/>
+          <p:cNvSpPr>
+            <a:spLocks noGrp="1"/>
+          </p:cNvSpPr>
+          <p:nvPr>
+            <p:ph type="title"/>
+          </p:nvPr>
+        </p:nvSpPr>
+        <p:spPr/>
+        <p:txBody>
+          <a:bodyPr/>
+          <a:lstStyle/>
+          <a:p>
+            <a:r>
+              <a:t>Workshop: 4 Hands-On Exercises</a:t>
+            </a:r>
+          </a:p>
+        </p:txBody>
+      </p:sp>
+      <p:sp>
+        <p:nvSpPr>
+          <p:cNvPr id="3" name="Content Placeholder 2"/>
+          <p:cNvSpPr>
+            <a:spLocks noGrp="1"/>
+          </p:cNvSpPr>
+          <p:nvPr>
+            <p:ph idx="1"/>
+          </p:nvPr>
+        </p:nvSpPr>
+        <p:spPr/>
+        <p:txBody>
+          <a:bodyPr/>
+          <a:lstStyle/>
+          <a:p>
+            <a:r>
+              <a:rPr sz="1600"/>
+              <a:t>Exercise 1:  From regression to classification - the sigmoid function</a:t>
+            </a:r>
+          </a:p>
+          <a:p>
+            <a:r>
+              <a:rPr sz="1600"/>
+              <a:t>Exercise 2:  Feature engineering - build phishing URL features from scratch</a:t>
+            </a:r>
+          </a:p>
+          <a:p>
+            <a:r>
+              <a:rPr sz="1600"/>
+              <a:t>Exercise 3:  Train and evaluate - classification report, confusion matrix</a:t>
+            </a:r>
+          </a:p>
+          <a:p>
+            <a:r>
+              <a:rPr sz="1600"/>
+              <a:t>Exercise 4:  Threshold tuning - find the right balance for your use case</a:t>
+            </a:r>
+          </a:p>
+          <a:p>
+            <a:r>
+              <a:rPr sz="1600"/>
+              <a:t/>
+            </a:r>
+          </a:p>
+          <a:p>
+            <a:r>
+              <a:rPr sz="1600"/>
+              <a:t>Each exercise: lecture.md (concept) + handson.md (build it yourself)</a:t>
+            </a:r>
+          </a:p>
+          <a:p>
+            <a:r>
+              <a:rPr sz="1600"/>
+              <a:t>Solution files provided to check your work</a:t>
+            </a:r>
+          </a:p>
+        </p:txBody>
+      </p:sp>
+    </p:spTree>
+  </p:cSld>
+  <p:clrMapOvr>
+    <a:masterClrMapping/>
+  </p:clrMapOvr>
+</p:sld>
+</file>
+
+<file path=ppt/slides/slide19.xml><?xml version="1.0" encoding="utf-8"?>
+<p:sld xmlns:a="http://schemas.openxmlformats.org/drawingml/2006/main" xmlns:p="http://schemas.openxmlformats.org/presentationml/2006/main" xmlns:r="http://schemas.openxmlformats.org/officeDocument/2006/relationships">
+  <p:cSld>
+    <p:spTree>
+      <p:nvGrpSpPr>
+        <p:cNvPr id="1" name=""/>
+        <p:cNvGrpSpPr/>
+        <p:nvPr/>
+      </p:nvGrpSpPr>
+      <p:grpSpPr/>
+      <p:sp>
+        <p:nvSpPr>
+          <p:cNvPr id="2" name="Text Placeholder 1"/>
+          <p:cNvSpPr>
+            <a:spLocks noGrp="1"/>
+          </p:cNvSpPr>
+          <p:nvPr>
+            <p:ph type="body" idx="12" sz="quarter"/>
+          </p:nvPr>
+        </p:nvSpPr>
+        <p:spPr/>
+        <p:txBody>
+          <a:bodyPr/>
+          <a:lstStyle/>
+          <a:p>
+            <a:r>
+              <a:rPr sz="1500"/>
+              <a:t>Logistic regression predicts probability (0 to 1) via the sigmoid function</a:t>
+            </a:r>
+          </a:p>
+          <a:p>
+            <a:r>
+              <a:rPr sz="1500"/>
+              <a:t>Feature engineering turns raw URLs into numbers the model can learn from</a:t>
+            </a:r>
+          </a:p>
+          <a:p>
+            <a:r>
+              <a:rPr sz="1500"/>
+              <a:t>Coefficients reveal which features drive predictions - built-in interpretability</a:t>
+            </a:r>
+          </a:p>
+          <a:p>
+            <a:r>
+              <a:rPr sz="1500"/>
+              <a:t>predict_proba() gives probabilities; predict() gives hard labels at threshold 0.5</a:t>
+            </a:r>
+          </a:p>
+          <a:p>
+            <a:r>
+              <a:rPr sz="1500"/>
+              <a:t>Threshold tuning balances precision (fewer false alarms) vs recall (catch more attacks)</a:t>
+            </a:r>
+          </a:p>
+          <a:p>
+            <a:r>
+              <a:rPr sz="1500"/>
+              <a:t>Next: Decision Trees - a different approach that learns if/else rules</a:t>
+            </a:r>
+          </a:p>
+        </p:txBody>
+      </p:sp>
+      <p:sp>
+        <p:nvSpPr>
+          <p:cNvPr id="3" name="Title 2"/>
+          <p:cNvSpPr>
+            <a:spLocks noGrp="1"/>
+          </p:cNvSpPr>
+          <p:nvPr>
+            <p:ph type="title"/>
+          </p:nvPr>
+        </p:nvSpPr>
+        <p:spPr/>
+        <p:txBody>
+          <a:bodyPr/>
+          <a:lstStyle/>
+          <a:p>
+            <a:r>
+              <a:t>Key</a:t>
+            </a:r>
+          </a:p>
+          <a:p>
+            <a:r>
+              <a:t>Takeaways</a:t>
             </a:r>
           </a:p>
         </p:txBody>
@@ -8906,45 +9402,33 @@
           <a:bodyPr/>
           <a:lstStyle/>
           <a:p>
-            <a:pPr/>
-            <a:r>
-              <a:t>From regression to classification — the sigmoid function</a:t>
-            </a:r>
-          </a:p>
-          <a:p>
-            <a:pPr/>
-            <a:r>
-              <a:t>Real-life example: phishing URL detector</a:t>
-            </a:r>
-          </a:p>
-          <a:p>
-            <a:pPr/>
-            <a:r>
-              <a:t>Feature coefficients — what matters most</a:t>
-            </a:r>
-          </a:p>
-          <a:p>
-            <a:pPr/>
-            <a:r>
-              <a:t>predict() vs predict_proba() — hard labels vs probabilities</a:t>
-            </a:r>
-          </a:p>
-          <a:p>
-            <a:pPr/>
-            <a:r>
-              <a:t>Decision boundaries and thresholds</a:t>
-            </a:r>
-          </a:p>
-          <a:p>
-            <a:pPr/>
-            <a:r>
-              <a:t>Threshold tuning for operational priorities</a:t>
-            </a:r>
-          </a:p>
-          <a:p>
-            <a:pPr/>
-            <a:r>
-              <a:t>Workshop: 4 hands-on exercises</a:t>
+            <a:r>
+              <a:rPr sz="1600"/>
+              <a:t>From regression to classification - the sigmoid function</a:t>
+            </a:r>
+          </a:p>
+          <a:p>
+            <a:r>
+              <a:rPr sz="1600"/>
+              <a:t>Phishing URL features - what makes a URL suspicious</a:t>
+            </a:r>
+          </a:p>
+          <a:p>
+            <a:r>
+              <a:rPr sz="1600"/>
+              <a:t>Training the model and interpreting coefficients</a:t>
+            </a:r>
+          </a:p>
+          <a:p>
+            <a:r>
+              <a:rPr sz="1600"/>
+              <a:t>Probabilities vs hard labels - predict_proba()</a:t>
+            </a:r>
+          </a:p>
+          <a:p>
+            <a:r>
+              <a:rPr sz="1600"/>
+              <a:t>Threshold tuning - balancing precision and recall</a:t>
             </a:r>
           </a:p>
         </p:txBody>
@@ -8965,7 +9449,67 @@
           <a:lstStyle/>
           <a:p>
             <a:r>
-              <a:t>Agenda</a:t>
+              <a:t>What We'll Cover</a:t>
+            </a:r>
+          </a:p>
+        </p:txBody>
+      </p:sp>
+    </p:spTree>
+  </p:cSld>
+  <p:clrMapOvr>
+    <a:masterClrMapping/>
+  </p:clrMapOvr>
+</p:sld>
+</file>
+
+<file path=ppt/slides/slide20.xml><?xml version="1.0" encoding="utf-8"?>
+<p:sld xmlns:a="http://schemas.openxmlformats.org/drawingml/2006/main" xmlns:p="http://schemas.openxmlformats.org/presentationml/2006/main" xmlns:r="http://schemas.openxmlformats.org/officeDocument/2006/relationships">
+  <p:cSld>
+    <p:spTree>
+      <p:nvGrpSpPr>
+        <p:cNvPr id="1" name=""/>
+        <p:cNvGrpSpPr/>
+        <p:nvPr/>
+      </p:nvGrpSpPr>
+      <p:grpSpPr/>
+      <p:sp>
+        <p:nvSpPr>
+          <p:cNvPr id="2" name="Text Placeholder 1"/>
+          <p:cNvSpPr>
+            <a:spLocks noGrp="1"/>
+          </p:cNvSpPr>
+          <p:nvPr>
+            <p:ph type="body" idx="13" sz="quarter"/>
+          </p:nvPr>
+        </p:nvSpPr>
+        <p:spPr/>
+        <p:txBody>
+          <a:bodyPr/>
+          <a:lstStyle/>
+          <a:p>
+            <a:r>
+              <a:t>Next:  Lesson 1.4 - Decision Trees</a:t>
+            </a:r>
+          </a:p>
+        </p:txBody>
+      </p:sp>
+      <p:sp>
+        <p:nvSpPr>
+          <p:cNvPr id="3" name="Text Placeholder 2"/>
+          <p:cNvSpPr>
+            <a:spLocks noGrp="1"/>
+          </p:cNvSpPr>
+          <p:nvPr>
+            <p:ph type="body" idx="14" sz="quarter"/>
+          </p:nvPr>
+        </p:nvSpPr>
+        <p:spPr/>
+        <p:txBody>
+          <a:bodyPr/>
+          <a:lstStyle/>
+          <a:p>
+            <a:r>
+              <a:t>Logistic Regression</a:t>
             </a:r>
           </a:p>
         </p:txBody>
@@ -9069,7 +9613,7 @@
           <a:lstStyle/>
           <a:p>
             <a:r>
-              <a:t>From Regression to Classification</a:t>
+              <a:t>Linear vs Logistic Regression</a:t>
             </a:r>
           </a:p>
         </p:txBody>
@@ -9089,39 +9633,57 @@
           <a:bodyPr/>
           <a:lstStyle/>
           <a:p>
-            <a:pPr/>
-            <a:r>
-              <a:t>Linear Regression (Lesson 1.2)</a:t>
-            </a:r>
-          </a:p>
-          <a:p>
-            <a:pPr/>
-          </a:p>
-          <a:p>
-            <a:pPr/>
-            <a:r>
+            <a:r>
+              <a:rPr sz="1400"/>
+              <a:t>Linear Regression</a:t>
+            </a:r>
+          </a:p>
+          <a:p>
+            <a:r>
+              <a:rPr sz="1400"/>
+              <a:t/>
+            </a:r>
+          </a:p>
+          <a:p>
+            <a:r>
+              <a:rPr sz="1400"/>
               <a:t>Predicts a number:</a:t>
             </a:r>
           </a:p>
           <a:p>
-            <a:pPr lvl="1"/>
-            <a:r>
-              <a:t>response_time = 247.3 ms</a:t>
-            </a:r>
-          </a:p>
-          <a:p>
-            <a:pPr/>
-          </a:p>
-          <a:p>
-            <a:pPr/>
-            <a:r>
-              <a:t>Output is continuous</a:t>
-            </a:r>
-          </a:p>
-          <a:p>
-            <a:pPr/>
-            <a:r>
-              <a:t>Can be any value</a:t>
+            <a:r>
+              <a:rPr sz="1400"/>
+              <a:t>  Response time = 247.3 ms</a:t>
+            </a:r>
+          </a:p>
+          <a:p>
+            <a:r>
+              <a:rPr sz="1400"/>
+              <a:t/>
+            </a:r>
+          </a:p>
+          <a:p>
+            <a:r>
+              <a:rPr sz="1400"/>
+              <a:t>Output range: any number</a:t>
+            </a:r>
+          </a:p>
+          <a:p>
+            <a:r>
+              <a:rPr sz="1400"/>
+              <a:t/>
+            </a:r>
+          </a:p>
+          <a:p>
+            <a:r>
+              <a:rPr sz="1400"/>
+              <a:t>Use case:</a:t>
+            </a:r>
+          </a:p>
+          <a:p>
+            <a:r>
+              <a:rPr sz="1400"/>
+              <a:t>  'How much response time?'</a:t>
             </a:r>
           </a:p>
         </p:txBody>
@@ -9141,39 +9703,57 @@
           <a:bodyPr/>
           <a:lstStyle/>
           <a:p>
-            <a:pPr/>
-            <a:r>
-              <a:t>Logistic Regression (this lesson)</a:t>
-            </a:r>
-          </a:p>
-          <a:p>
-            <a:pPr/>
-          </a:p>
-          <a:p>
-            <a:pPr/>
-            <a:r>
+            <a:r>
+              <a:rPr sz="1400"/>
+              <a:t>Logistic Regression</a:t>
+            </a:r>
+          </a:p>
+          <a:p>
+            <a:r>
+              <a:rPr sz="1400"/>
+              <a:t/>
+            </a:r>
+          </a:p>
+          <a:p>
+            <a:r>
+              <a:rPr sz="1400"/>
               <a:t>Predicts a probability:</a:t>
             </a:r>
           </a:p>
           <a:p>
-            <a:pPr lvl="1"/>
-            <a:r>
-              <a:t>P(phishing) = 0.87</a:t>
-            </a:r>
-          </a:p>
-          <a:p>
-            <a:pPr/>
-          </a:p>
-          <a:p>
-            <a:pPr/>
-            <a:r>
-              <a:t>Then applies a threshold:</a:t>
-            </a:r>
-          </a:p>
-          <a:p>
-            <a:pPr/>
-            <a:r>
-              <a:t>If P &gt; 0.5 → classify as phishing</a:t>
+            <a:r>
+              <a:rPr sz="1400"/>
+              <a:t>  P(phishing) = 0.87</a:t>
+            </a:r>
+          </a:p>
+          <a:p>
+            <a:r>
+              <a:rPr sz="1400"/>
+              <a:t/>
+            </a:r>
+          </a:p>
+          <a:p>
+            <a:r>
+              <a:rPr sz="1400"/>
+              <a:t>Output range: 0 to 1</a:t>
+            </a:r>
+          </a:p>
+          <a:p>
+            <a:r>
+              <a:rPr sz="1400"/>
+              <a:t/>
+            </a:r>
+          </a:p>
+          <a:p>
+            <a:r>
+              <a:rPr sz="1400"/>
+              <a:t>Use case:</a:t>
+            </a:r>
+          </a:p>
+          <a:p>
+            <a:r>
+              <a:rPr sz="1400"/>
+              <a:t>  'Is this URL phishing?'</a:t>
             </a:r>
           </a:p>
         </p:txBody>
@@ -9212,14 +9792,14 @@
           <a:lstStyle/>
           <a:p>
             <a:r>
-              <a:t>The Sigmoid Function</a:t>
+              <a:t>The Sigmoid Function - Squashing Scores into Probabilities</a:t>
             </a:r>
           </a:p>
         </p:txBody>
       </p:sp>
       <p:pic>
         <p:nvPicPr>
-          <p:cNvPr id="3" name="Picture 2" descr="log_sigmoid.png"/>
+          <p:cNvPr id="3" name="Picture 2" descr="sigmoid.png"/>
           <p:cNvPicPr>
             <a:picLocks noChangeAspect="1"/>
           </p:cNvPicPr>
@@ -9233,8 +9813,8 @@
         </p:blipFill>
         <p:spPr>
           <a:xfrm>
-            <a:off x="2011680" y="1371600"/>
-            <a:ext cx="8229600" cy="5052889"/>
+            <a:off x="640080" y="1188720"/>
+            <a:ext cx="10972800" cy="4891829"/>
           </a:xfrm>
           <a:prstGeom prst="rect">
             <a:avLst/>
@@ -9280,7 +9860,7 @@
           </a:p>
           <a:p>
             <a:r>
-              <a:t>Detection</a:t>
+              <a:t>Feature Engineering</a:t>
             </a:r>
           </a:p>
         </p:txBody>
@@ -9340,14 +9920,14 @@
           <a:lstStyle/>
           <a:p>
             <a:r>
-              <a:t>Phishing URL Red Flags — Extractable as Features</a:t>
+              <a:t>Six Signals Extracted from Every URL</a:t>
             </a:r>
           </a:p>
         </p:txBody>
       </p:sp>
       <p:pic>
         <p:nvPicPr>
-          <p:cNvPr id="3" name="Picture 2" descr="log_features.png"/>
+          <p:cNvPr id="3" name="Picture 2" descr="url_features.png"/>
           <p:cNvPicPr>
             <a:picLocks noChangeAspect="1"/>
           </p:cNvPicPr>
@@ -9361,8 +9941,8 @@
         </p:blipFill>
         <p:spPr>
           <a:xfrm>
-            <a:off x="1097280" y="1188720"/>
-            <a:ext cx="10058400" cy="5577687"/>
+            <a:off x="457200" y="1280160"/>
+            <a:ext cx="11247120" cy="4101891"/>
           </a:xfrm>
           <a:prstGeom prst="rect">
             <a:avLst/>
@@ -9389,7 +9969,80 @@
       <p:grpSpPr/>
       <p:sp>
         <p:nvSpPr>
-          <p:cNvPr id="2" name="Title 1"/>
+          <p:cNvPr id="2" name="Text Placeholder 1"/>
+          <p:cNvSpPr>
+            <a:spLocks noGrp="1"/>
+          </p:cNvSpPr>
+          <p:nvPr>
+            <p:ph type="body" idx="14" sz="quarter"/>
+          </p:nvPr>
+        </p:nvSpPr>
+        <p:spPr/>
+        <p:txBody>
+          <a:bodyPr/>
+          <a:lstStyle/>
+          <a:p>
+            <a:r>
+              <a:t/>
+            </a:r>
+          </a:p>
+        </p:txBody>
+      </p:sp>
+      <p:sp>
+        <p:nvSpPr>
+          <p:cNvPr id="3" name="Text Placeholder 2"/>
+          <p:cNvSpPr>
+            <a:spLocks noGrp="1"/>
+          </p:cNvSpPr>
+          <p:nvPr>
+            <p:ph type="body" idx="15" sz="quarter"/>
+          </p:nvPr>
+        </p:nvSpPr>
+        <p:spPr/>
+        <p:txBody>
+          <a:bodyPr/>
+          <a:lstStyle/>
+          <a:p>
+            <a:r>
+              <a:rPr sz="1400"/>
+              <a:t>Feature engineering is where</a:t>
+            </a:r>
+          </a:p>
+          <a:p>
+            <a:r>
+              <a:rPr sz="1400"/>
+              <a:t>domain expertise matters most.</a:t>
+            </a:r>
+          </a:p>
+          <a:p>
+            <a:r>
+              <a:rPr sz="1400"/>
+              <a:t/>
+            </a:r>
+          </a:p>
+          <a:p>
+            <a:r>
+              <a:rPr sz="1400"/>
+              <a:t>A security analyst knows which</a:t>
+            </a:r>
+          </a:p>
+          <a:p>
+            <a:r>
+              <a:rPr sz="1400"/>
+              <a:t>URL patterns are suspicious -</a:t>
+            </a:r>
+          </a:p>
+          <a:p>
+            <a:r>
+              <a:rPr sz="1400"/>
+              <a:t>the model just quantifies it.</a:t>
+            </a:r>
+          </a:p>
+        </p:txBody>
+      </p:sp>
+      <p:sp>
+        <p:nvSpPr>
+          <p:cNvPr id="4" name="Title 3"/>
           <p:cNvSpPr>
             <a:spLocks noGrp="1"/>
           </p:cNvSpPr>
@@ -9403,35 +10056,75 @@
           <a:lstStyle/>
           <a:p>
             <a:r>
-              <a:t>Feature Coefficients — What Drives the Prediction</a:t>
-            </a:r>
-          </a:p>
-        </p:txBody>
-      </p:sp>
-      <p:pic>
-        <p:nvPicPr>
-          <p:cNvPr id="3" name="Picture 2" descr="log_coefs.png"/>
-          <p:cNvPicPr>
-            <a:picLocks noChangeAspect="1"/>
-          </p:cNvPicPr>
-          <p:nvPr/>
-        </p:nvPicPr>
-        <p:blipFill>
-          <a:blip r:embed="rId2"/>
-          <a:stretch>
-            <a:fillRect/>
-          </a:stretch>
-        </p:blipFill>
-        <p:spPr>
-          <a:xfrm>
-            <a:off x="2011680" y="1371600"/>
-            <a:ext cx="8229600" cy="7107964"/>
-          </a:xfrm>
-          <a:prstGeom prst="rect">
-            <a:avLst/>
-          </a:prstGeom>
-        </p:spPr>
-      </p:pic>
+              <a:t>Feature Engineering for Security</a:t>
+            </a:r>
+          </a:p>
+        </p:txBody>
+      </p:sp>
+      <p:sp>
+        <p:nvSpPr>
+          <p:cNvPr id="5" name="Text Placeholder 4"/>
+          <p:cNvSpPr>
+            <a:spLocks noGrp="1"/>
+          </p:cNvSpPr>
+          <p:nvPr>
+            <p:ph type="body" idx="16" sz="quarter"/>
+          </p:nvPr>
+        </p:nvSpPr>
+        <p:spPr/>
+        <p:txBody>
+          <a:bodyPr/>
+          <a:lstStyle/>
+          <a:p>
+            <a:r>
+              <a:rPr sz="1400"/>
+              <a:t>Every URL becomes a row of numbers:</a:t>
+            </a:r>
+          </a:p>
+          <a:p>
+            <a:r>
+              <a:rPr sz="1400"/>
+              <a:t>  [92, 5, 1, 1, 3, 0]</a:t>
+            </a:r>
+          </a:p>
+          <a:p>
+            <a:r>
+              <a:rPr sz="1400"/>
+              <a:t/>
+            </a:r>
+          </a:p>
+          <a:p>
+            <a:r>
+              <a:rPr sz="1400"/>
+              <a:t>The model never sees the raw URL</a:t>
+            </a:r>
+          </a:p>
+          <a:p>
+            <a:r>
+              <a:rPr sz="1400"/>
+              <a:t>  - only the extracted features</a:t>
+            </a:r>
+          </a:p>
+          <a:p>
+            <a:r>
+              <a:rPr sz="1400"/>
+              <a:t/>
+            </a:r>
+          </a:p>
+          <a:p>
+            <a:r>
+              <a:rPr sz="1400"/>
+              <a:t>Feature quality determines model</a:t>
+            </a:r>
+          </a:p>
+          <a:p>
+            <a:r>
+              <a:rPr sz="1400"/>
+              <a:t>quality - garbage in, garbage out</a:t>
+            </a:r>
+          </a:p>
+        </p:txBody>
+      </p:sp>
     </p:spTree>
   </p:cSld>
   <p:clrMapOvr>
@@ -9457,7 +10150,7 @@
             <a:spLocks noGrp="1"/>
           </p:cNvSpPr>
           <p:nvPr>
-            <p:ph type="body" idx="14" sz="quarter"/>
+            <p:ph type="body" idx="13" sz="quarter"/>
           </p:nvPr>
         </p:nvSpPr>
         <p:spPr/>
@@ -9466,7 +10159,12 @@
           <a:lstStyle/>
           <a:p>
             <a:r>
-              <a:t>— Interpretability matters in security</a:t>
+              <a:t>Training the Model</a:t>
+            </a:r>
+          </a:p>
+          <a:p>
+            <a:r>
+              <a:t>and Reading Results</a:t>
             </a:r>
           </a:p>
         </p:txBody>
@@ -9474,58 +10172,6 @@
       <p:sp>
         <p:nvSpPr>
           <p:cNvPr id="3" name="Text Placeholder 2"/>
-          <p:cNvSpPr>
-            <a:spLocks noGrp="1"/>
-          </p:cNvSpPr>
-          <p:nvPr>
-            <p:ph type="body" idx="15" sz="quarter"/>
-          </p:nvPr>
-        </p:nvSpPr>
-        <p:spPr/>
-        <p:txBody>
-          <a:bodyPr/>
-          <a:lstStyle/>
-          <a:p>
-            <a:r>
-              <a:t>You can explain to a</a:t>
-            </a:r>
-          </a:p>
-          <a:p>
-            <a:r>
-              <a:t>non-technical stakeholder</a:t>
-            </a:r>
-          </a:p>
-          <a:p>
-            <a:r>
-              <a:t>exactly why a URL was flagged.</a:t>
-            </a:r>
-          </a:p>
-        </p:txBody>
-      </p:sp>
-      <p:sp>
-        <p:nvSpPr>
-          <p:cNvPr id="4" name="Title 3"/>
-          <p:cNvSpPr>
-            <a:spLocks noGrp="1"/>
-          </p:cNvSpPr>
-          <p:nvPr>
-            <p:ph type="title"/>
-          </p:nvPr>
-        </p:nvSpPr>
-        <p:spPr/>
-        <p:txBody>
-          <a:bodyPr/>
-          <a:lstStyle/>
-          <a:p>
-            <a:r>
-              <a:t>Interpreting Coefficients</a:t>
-            </a:r>
-          </a:p>
-        </p:txBody>
-      </p:sp>
-      <p:sp>
-        <p:nvSpPr>
-          <p:cNvPr id="5" name="Text Placeholder 4"/>
           <p:cNvSpPr>
             <a:spLocks noGrp="1"/>
           </p:cNvSpPr>
@@ -9538,42 +10184,8 @@
           <a:bodyPr/>
           <a:lstStyle/>
           <a:p>
-            <a:pPr/>
-            <a:r>
-              <a:t>model.coef_ shows feature impact:</a:t>
-            </a:r>
-          </a:p>
-          <a:p>
-            <a:pPr lvl="1"/>
-            <a:r>
-              <a:t>Positive → increases P(phishing)</a:t>
-            </a:r>
-          </a:p>
-          <a:p>
-            <a:pPr lvl="1"/>
-            <a:r>
-              <a:t>Negative → decreases P(phishing)</a:t>
-            </a:r>
-          </a:p>
-          <a:p>
-            <a:pPr/>
-          </a:p>
-          <a:p>
-            <a:pPr/>
-            <a:r>
-              <a:t>Directly interpretable:</a:t>
-            </a:r>
-          </a:p>
-          <a:p>
-            <a:pPr lvl="1"/>
-            <a:r>
-              <a:t>num_dots: +1.45 (highly suspicious)</a:t>
-            </a:r>
-          </a:p>
-          <a:p>
-            <a:pPr lvl="1"/>
-            <a:r>
-              <a:t>domain_age: −0.91 (older = trustworthy)</a:t>
+            <a:r>
+              <a:t>03</a:t>
             </a:r>
           </a:p>
         </p:txBody>

--- a/stage1_classic_ml/03_logistic_regression/Lecture-3-Logistic-Regression.pptx
+++ b/stage1_classic_ml/03_logistic_regression/Lecture-3-Logistic-Regression.pptx
@@ -8313,6 +8313,9 @@
           <a:lstStyle/>
           <a:p>
             <a:r>
+              <a:rPr>
+                <a:latin typeface="Calibri"/>
+              </a:rPr>
               <a:t>AI Basic Training</a:t>
             </a:r>
           </a:p>
@@ -8334,6 +8337,9 @@
           <a:lstStyle/>
           <a:p>
             <a:r>
+              <a:rPr>
+                <a:latin typeface="Calibri"/>
+              </a:rPr>
               <a:t>Lesson 1.3  |  Stage 1: Classic Machine Learning</a:t>
             </a:r>
           </a:p>
@@ -8355,6 +8361,9 @@
           <a:lstStyle/>
           <a:p>
             <a:r>
+              <a:rPr b="1">
+                <a:latin typeface="Calibri"/>
+              </a:rPr>
               <a:t>Logistic Regression</a:t>
             </a:r>
           </a:p>
@@ -8376,6 +8385,9 @@
           <a:lstStyle/>
           <a:p>
             <a:r>
+              <a:rPr>
+                <a:latin typeface="Calibri"/>
+              </a:rPr>
               <a:t>From Numbers to Decisions  -  Building a Phishing Classifier</a:t>
             </a:r>
           </a:p>
@@ -8415,6 +8427,9 @@
           <a:lstStyle/>
           <a:p>
             <a:r>
+              <a:rPr b="1">
+                <a:latin typeface="Calibri"/>
+              </a:rPr>
               <a:t>The Code - Familiar Pattern from Lesson 1.2</a:t>
             </a:r>
           </a:p>
@@ -8436,61 +8451,81 @@
           <a:lstStyle/>
           <a:p>
             <a:r>
-              <a:rPr sz="1500"/>
+              <a:rPr sz="1500">
+                <a:latin typeface="Calibri"/>
+              </a:rPr>
               <a:t>from sklearn.linear_model import LogisticRegression</a:t>
             </a:r>
           </a:p>
           <a:p>
             <a:r>
-              <a:rPr sz="1500"/>
+              <a:rPr sz="1500">
+                <a:latin typeface="Calibri"/>
+              </a:rPr>
               <a:t>from sklearn.preprocessing import StandardScaler</a:t>
             </a:r>
           </a:p>
           <a:p>
             <a:r>
-              <a:rPr sz="1500"/>
+              <a:rPr sz="1500">
+                <a:latin typeface="Calibri"/>
+              </a:rPr>
               <a:t/>
             </a:r>
           </a:p>
           <a:p>
             <a:r>
-              <a:rPr sz="1500"/>
+              <a:rPr sz="1500">
+                <a:latin typeface="Calibri"/>
+              </a:rPr>
               <a:t>scaler = StandardScaler()</a:t>
             </a:r>
           </a:p>
           <a:p>
             <a:r>
-              <a:rPr sz="1500"/>
+              <a:rPr sz="1500">
+                <a:latin typeface="Calibri"/>
+              </a:rPr>
               <a:t>X_train_scaled = scaler.fit_transform(X_train)</a:t>
             </a:r>
           </a:p>
           <a:p>
             <a:r>
-              <a:rPr sz="1500"/>
+              <a:rPr sz="1500">
+                <a:latin typeface="Calibri"/>
+              </a:rPr>
               <a:t>X_test_scaled = scaler.transform(X_test)</a:t>
             </a:r>
           </a:p>
           <a:p>
             <a:r>
-              <a:rPr sz="1500"/>
+              <a:rPr sz="1500">
+                <a:latin typeface="Calibri"/>
+              </a:rPr>
               <a:t/>
             </a:r>
           </a:p>
           <a:p>
             <a:r>
-              <a:rPr sz="1500"/>
+              <a:rPr sz="1500">
+                <a:latin typeface="Calibri"/>
+              </a:rPr>
               <a:t>model = LogisticRegression()</a:t>
             </a:r>
           </a:p>
           <a:p>
             <a:r>
-              <a:rPr sz="1500"/>
+              <a:rPr sz="1500">
+                <a:latin typeface="Calibri"/>
+              </a:rPr>
               <a:t>model.fit(X_train_scaled, y_train)</a:t>
             </a:r>
           </a:p>
           <a:p>
             <a:r>
-              <a:rPr sz="1500"/>
+              <a:rPr sz="1500">
+                <a:latin typeface="Calibri"/>
+              </a:rPr>
               <a:t>y_pred = model.predict(X_test_scaled)</a:t>
             </a:r>
           </a:p>
@@ -8530,6 +8565,9 @@
           <a:lstStyle/>
           <a:p>
             <a:r>
+              <a:rPr b="1">
+                <a:latin typeface="Calibri"/>
+              </a:rPr>
               <a:t>Feature Coefficients - What Drives the Prediction</a:t>
             </a:r>
           </a:p>
@@ -8593,6 +8631,9 @@
           <a:lstStyle/>
           <a:p>
             <a:r>
+              <a:rPr>
+                <a:latin typeface="Calibri"/>
+              </a:rPr>
               <a:t/>
             </a:r>
           </a:p>
@@ -8614,37 +8655,49 @@
           <a:lstStyle/>
           <a:p>
             <a:r>
-              <a:rPr sz="1400"/>
+              <a:rPr sz="1400">
+                <a:latin typeface="Calibri"/>
+              </a:rPr>
               <a:t>In security, a model that</a:t>
             </a:r>
           </a:p>
           <a:p>
             <a:r>
-              <a:rPr sz="1400"/>
+              <a:rPr sz="1400">
+                <a:latin typeface="Calibri"/>
+              </a:rPr>
               <a:t>cannot be explained will</a:t>
             </a:r>
           </a:p>
           <a:p>
             <a:r>
-              <a:rPr sz="1400"/>
+              <a:rPr sz="1400">
+                <a:latin typeface="Calibri"/>
+              </a:rPr>
               <a:t>not be trusted.</a:t>
             </a:r>
           </a:p>
           <a:p>
             <a:r>
-              <a:rPr sz="1400"/>
+              <a:rPr sz="1400">
+                <a:latin typeface="Calibri"/>
+              </a:rPr>
               <a:t/>
             </a:r>
           </a:p>
           <a:p>
             <a:r>
-              <a:rPr sz="1400"/>
+              <a:rPr sz="1400">
+                <a:latin typeface="Calibri"/>
+              </a:rPr>
               <a:t>Logistic regression gives</a:t>
             </a:r>
           </a:p>
           <a:p>
             <a:r>
-              <a:rPr sz="1400"/>
+              <a:rPr sz="1400">
+                <a:latin typeface="Calibri"/>
+              </a:rPr>
               <a:t>you built-in transparency.</a:t>
             </a:r>
           </a:p>
@@ -8666,6 +8719,9 @@
           <a:lstStyle/>
           <a:p>
             <a:r>
+              <a:rPr b="1">
+                <a:latin typeface="Calibri"/>
+              </a:rPr>
               <a:t>Why Interpretability Matters</a:t>
             </a:r>
           </a:p>
@@ -8687,55 +8743,73 @@
           <a:lstStyle/>
           <a:p>
             <a:r>
-              <a:rPr sz="1400"/>
+              <a:rPr sz="1400">
+                <a:latin typeface="Calibri"/>
+              </a:rPr>
               <a:t>model.coef_ tells you:</a:t>
             </a:r>
           </a:p>
           <a:p>
             <a:r>
-              <a:rPr sz="1400"/>
+              <a:rPr sz="1400">
+                <a:latin typeface="Calibri"/>
+              </a:rPr>
               <a:t>  which features increase risk</a:t>
             </a:r>
           </a:p>
           <a:p>
             <a:r>
-              <a:rPr sz="1400"/>
+              <a:rPr sz="1400">
+                <a:latin typeface="Calibri"/>
+              </a:rPr>
               <a:t>  which features decrease risk</a:t>
             </a:r>
           </a:p>
           <a:p>
             <a:r>
-              <a:rPr sz="1400"/>
+              <a:rPr sz="1400">
+                <a:latin typeface="Calibri"/>
+              </a:rPr>
               <a:t>  how much each one contributes</a:t>
             </a:r>
           </a:p>
           <a:p>
             <a:r>
-              <a:rPr sz="1400"/>
+              <a:rPr sz="1400">
+                <a:latin typeface="Calibri"/>
+              </a:rPr>
               <a:t/>
             </a:r>
           </a:p>
           <a:p>
             <a:r>
-              <a:rPr sz="1400"/>
+              <a:rPr sz="1400">
+                <a:latin typeface="Calibri"/>
+              </a:rPr>
               <a:t>You can explain to stakeholders:</a:t>
             </a:r>
           </a:p>
           <a:p>
             <a:r>
-              <a:rPr sz="1400"/>
+              <a:rPr sz="1400">
+                <a:latin typeface="Calibri"/>
+              </a:rPr>
               <a:t>  'This URL was flagged because</a:t>
             </a:r>
           </a:p>
           <a:p>
             <a:r>
-              <a:rPr sz="1400"/>
+              <a:rPr sz="1400">
+                <a:latin typeface="Calibri"/>
+              </a:rPr>
               <a:t>  it has 5 dots, uses an IP address,</a:t>
             </a:r>
           </a:p>
           <a:p>
             <a:r>
-              <a:rPr sz="1400"/>
+              <a:rPr sz="1400">
+                <a:latin typeface="Calibri"/>
+              </a:rPr>
               <a:t>  and contains an @ symbol.'</a:t>
             </a:r>
           </a:p>
@@ -8775,11 +8849,17 @@
           <a:lstStyle/>
           <a:p>
             <a:r>
+              <a:rPr b="1">
+                <a:latin typeface="Calibri"/>
+              </a:rPr>
               <a:t>Probabilities</a:t>
             </a:r>
           </a:p>
           <a:p>
             <a:r>
+              <a:rPr b="1">
+                <a:latin typeface="Calibri"/>
+              </a:rPr>
               <a:t>and Thresholds</a:t>
             </a:r>
           </a:p>
@@ -8801,6 +8881,9 @@
           <a:lstStyle/>
           <a:p>
             <a:r>
+              <a:rPr b="1">
+                <a:latin typeface="Calibri"/>
+              </a:rPr>
               <a:t>04</a:t>
             </a:r>
           </a:p>
@@ -8840,6 +8923,9 @@
           <a:lstStyle/>
           <a:p>
             <a:r>
+              <a:rPr b="1">
+                <a:latin typeface="Calibri"/>
+              </a:rPr>
               <a:t>Two Ways to Get Predictions</a:t>
             </a:r>
           </a:p>
@@ -8903,6 +8989,9 @@
           <a:lstStyle/>
           <a:p>
             <a:r>
+              <a:rPr b="1">
+                <a:latin typeface="Calibri"/>
+              </a:rPr>
               <a:t>Tuning the Decision Threshold</a:t>
             </a:r>
           </a:p>
@@ -8966,6 +9055,9 @@
           <a:lstStyle/>
           <a:p>
             <a:r>
+              <a:rPr b="1">
+                <a:latin typeface="Calibri"/>
+              </a:rPr>
               <a:t>Choosing the Right Threshold</a:t>
             </a:r>
           </a:p>
@@ -8987,55 +9079,73 @@
           <a:lstStyle/>
           <a:p>
             <a:r>
-              <a:rPr sz="1400"/>
+              <a:rPr sz="1400">
+                <a:latin typeface="Calibri"/>
+              </a:rPr>
               <a:t>Lower threshold (e.g. 0.3)</a:t>
             </a:r>
           </a:p>
           <a:p>
             <a:r>
-              <a:rPr sz="1400"/>
+              <a:rPr sz="1400">
+                <a:latin typeface="Calibri"/>
+              </a:rPr>
               <a:t/>
             </a:r>
           </a:p>
           <a:p>
             <a:r>
-              <a:rPr sz="1400"/>
+              <a:rPr sz="1400">
+                <a:latin typeface="Calibri"/>
+              </a:rPr>
               <a:t>Catches more phishing URLs</a:t>
             </a:r>
           </a:p>
           <a:p>
             <a:r>
-              <a:rPr sz="1400"/>
+              <a:rPr sz="1400">
+                <a:latin typeface="Calibri"/>
+              </a:rPr>
               <a:t>More false alarms</a:t>
             </a:r>
           </a:p>
           <a:p>
             <a:r>
-              <a:rPr sz="1400"/>
+              <a:rPr sz="1400">
+                <a:latin typeface="Calibri"/>
+              </a:rPr>
               <a:t/>
             </a:r>
           </a:p>
           <a:p>
             <a:r>
-              <a:rPr sz="1400"/>
+              <a:rPr sz="1400">
+                <a:latin typeface="Calibri"/>
+              </a:rPr>
               <a:t>Best when:</a:t>
             </a:r>
           </a:p>
           <a:p>
             <a:r>
-              <a:rPr sz="1400"/>
+              <a:rPr sz="1400">
+                <a:latin typeface="Calibri"/>
+              </a:rPr>
               <a:t>  Missing an attack is costly</a:t>
             </a:r>
           </a:p>
           <a:p>
             <a:r>
-              <a:rPr sz="1400"/>
+              <a:rPr sz="1400">
+                <a:latin typeface="Calibri"/>
+              </a:rPr>
               <a:t>  SOC team can handle volume</a:t>
             </a:r>
           </a:p>
           <a:p>
             <a:r>
-              <a:rPr sz="1400"/>
+              <a:rPr sz="1400">
+                <a:latin typeface="Calibri"/>
+              </a:rPr>
               <a:t>  Alerting, not blocking</a:t>
             </a:r>
           </a:p>
@@ -9057,55 +9167,73 @@
           <a:lstStyle/>
           <a:p>
             <a:r>
-              <a:rPr sz="1400"/>
+              <a:rPr sz="1400">
+                <a:latin typeface="Calibri"/>
+              </a:rPr>
               <a:t>Higher threshold (e.g. 0.8)</a:t>
             </a:r>
           </a:p>
           <a:p>
             <a:r>
-              <a:rPr sz="1400"/>
+              <a:rPr sz="1400">
+                <a:latin typeface="Calibri"/>
+              </a:rPr>
               <a:t/>
             </a:r>
           </a:p>
           <a:p>
             <a:r>
-              <a:rPr sz="1400"/>
+              <a:rPr sz="1400">
+                <a:latin typeface="Calibri"/>
+              </a:rPr>
               <a:t>Fewer false alarms</a:t>
             </a:r>
           </a:p>
           <a:p>
             <a:r>
-              <a:rPr sz="1400"/>
+              <a:rPr sz="1400">
+                <a:latin typeface="Calibri"/>
+              </a:rPr>
               <a:t>May miss some phishing</a:t>
             </a:r>
           </a:p>
           <a:p>
             <a:r>
-              <a:rPr sz="1400"/>
+              <a:rPr sz="1400">
+                <a:latin typeface="Calibri"/>
+              </a:rPr>
               <a:t/>
             </a:r>
           </a:p>
           <a:p>
             <a:r>
-              <a:rPr sz="1400"/>
+              <a:rPr sz="1400">
+                <a:latin typeface="Calibri"/>
+              </a:rPr>
               <a:t>Best when:</a:t>
             </a:r>
           </a:p>
           <a:p>
             <a:r>
-              <a:rPr sz="1400"/>
+              <a:rPr sz="1400">
+                <a:latin typeface="Calibri"/>
+              </a:rPr>
               <a:t>  Auto-blocking URLs</a:t>
             </a:r>
           </a:p>
           <a:p>
             <a:r>
-              <a:rPr sz="1400"/>
+              <a:rPr sz="1400">
+                <a:latin typeface="Calibri"/>
+              </a:rPr>
               <a:t>  Blocking legit = major cost</a:t>
             </a:r>
           </a:p>
           <a:p>
             <a:r>
-              <a:rPr sz="1400"/>
+              <a:rPr sz="1400">
+                <a:latin typeface="Calibri"/>
+              </a:rPr>
               <a:t>  Small team, less capacity</a:t>
             </a:r>
           </a:p>
@@ -9145,11 +9273,17 @@
           <a:lstStyle/>
           <a:p>
             <a:r>
+              <a:rPr b="1">
+                <a:latin typeface="Calibri"/>
+              </a:rPr>
               <a:t>Workshop</a:t>
             </a:r>
           </a:p>
           <a:p>
             <a:r>
+              <a:rPr b="1">
+                <a:latin typeface="Calibri"/>
+              </a:rPr>
               <a:t>and Next Steps</a:t>
             </a:r>
           </a:p>
@@ -9171,6 +9305,9 @@
           <a:lstStyle/>
           <a:p>
             <a:r>
+              <a:rPr b="1">
+                <a:latin typeface="Calibri"/>
+              </a:rPr>
               <a:t>05</a:t>
             </a:r>
           </a:p>
@@ -9210,6 +9347,9 @@
           <a:lstStyle/>
           <a:p>
             <a:r>
+              <a:rPr b="1">
+                <a:latin typeface="Calibri"/>
+              </a:rPr>
               <a:t>Workshop: 4 Hands-On Exercises</a:t>
             </a:r>
           </a:p>
@@ -9231,43 +9371,57 @@
           <a:lstStyle/>
           <a:p>
             <a:r>
-              <a:rPr sz="1600"/>
+              <a:rPr sz="1600">
+                <a:latin typeface="Calibri"/>
+              </a:rPr>
               <a:t>Exercise 1:  From regression to classification - the sigmoid function</a:t>
             </a:r>
           </a:p>
           <a:p>
             <a:r>
-              <a:rPr sz="1600"/>
+              <a:rPr sz="1600">
+                <a:latin typeface="Calibri"/>
+              </a:rPr>
               <a:t>Exercise 2:  Feature engineering - build phishing URL features from scratch</a:t>
             </a:r>
           </a:p>
           <a:p>
             <a:r>
-              <a:rPr sz="1600"/>
+              <a:rPr sz="1600">
+                <a:latin typeface="Calibri"/>
+              </a:rPr>
               <a:t>Exercise 3:  Train and evaluate - classification report, confusion matrix</a:t>
             </a:r>
           </a:p>
           <a:p>
             <a:r>
-              <a:rPr sz="1600"/>
+              <a:rPr sz="1600">
+                <a:latin typeface="Calibri"/>
+              </a:rPr>
               <a:t>Exercise 4:  Threshold tuning - find the right balance for your use case</a:t>
             </a:r>
           </a:p>
           <a:p>
             <a:r>
-              <a:rPr sz="1600"/>
+              <a:rPr sz="1600">
+                <a:latin typeface="Calibri"/>
+              </a:rPr>
               <a:t/>
             </a:r>
           </a:p>
           <a:p>
             <a:r>
-              <a:rPr sz="1600"/>
+              <a:rPr sz="1600">
+                <a:latin typeface="Calibri"/>
+              </a:rPr>
               <a:t>Each exercise: lecture.md (concept) + handson.md (build it yourself)</a:t>
             </a:r>
           </a:p>
           <a:p>
             <a:r>
-              <a:rPr sz="1600"/>
+              <a:rPr sz="1600">
+                <a:latin typeface="Calibri"/>
+              </a:rPr>
               <a:t>Solution files provided to check your work</a:t>
             </a:r>
           </a:p>
@@ -9307,37 +9461,49 @@
           <a:lstStyle/>
           <a:p>
             <a:r>
-              <a:rPr sz="1500"/>
+              <a:rPr sz="1500">
+                <a:latin typeface="Calibri"/>
+              </a:rPr>
               <a:t>Logistic regression predicts probability (0 to 1) via the sigmoid function</a:t>
             </a:r>
           </a:p>
           <a:p>
             <a:r>
-              <a:rPr sz="1500"/>
+              <a:rPr sz="1500">
+                <a:latin typeface="Calibri"/>
+              </a:rPr>
               <a:t>Feature engineering turns raw URLs into numbers the model can learn from</a:t>
             </a:r>
           </a:p>
           <a:p>
             <a:r>
-              <a:rPr sz="1500"/>
+              <a:rPr sz="1500">
+                <a:latin typeface="Calibri"/>
+              </a:rPr>
               <a:t>Coefficients reveal which features drive predictions - built-in interpretability</a:t>
             </a:r>
           </a:p>
           <a:p>
             <a:r>
-              <a:rPr sz="1500"/>
+              <a:rPr sz="1500">
+                <a:latin typeface="Calibri"/>
+              </a:rPr>
               <a:t>predict_proba() gives probabilities; predict() gives hard labels at threshold 0.5</a:t>
             </a:r>
           </a:p>
           <a:p>
             <a:r>
-              <a:rPr sz="1500"/>
+              <a:rPr sz="1500">
+                <a:latin typeface="Calibri"/>
+              </a:rPr>
               <a:t>Threshold tuning balances precision (fewer false alarms) vs recall (catch more attacks)</a:t>
             </a:r>
           </a:p>
           <a:p>
             <a:r>
-              <a:rPr sz="1500"/>
+              <a:rPr sz="1500">
+                <a:latin typeface="Calibri"/>
+              </a:rPr>
               <a:t>Next: Decision Trees - a different approach that learns if/else rules</a:t>
             </a:r>
           </a:p>
@@ -9359,11 +9525,17 @@
           <a:lstStyle/>
           <a:p>
             <a:r>
+              <a:rPr b="1">
+                <a:latin typeface="Calibri"/>
+              </a:rPr>
               <a:t>Key</a:t>
             </a:r>
           </a:p>
           <a:p>
             <a:r>
+              <a:rPr b="1">
+                <a:latin typeface="Calibri"/>
+              </a:rPr>
               <a:t>Takeaways</a:t>
             </a:r>
           </a:p>
@@ -9403,31 +9575,41 @@
           <a:lstStyle/>
           <a:p>
             <a:r>
-              <a:rPr sz="1600"/>
+              <a:rPr sz="1600">
+                <a:latin typeface="Calibri"/>
+              </a:rPr>
               <a:t>From regression to classification - the sigmoid function</a:t>
             </a:r>
           </a:p>
           <a:p>
             <a:r>
-              <a:rPr sz="1600"/>
+              <a:rPr sz="1600">
+                <a:latin typeface="Calibri"/>
+              </a:rPr>
               <a:t>Phishing URL features - what makes a URL suspicious</a:t>
             </a:r>
           </a:p>
           <a:p>
             <a:r>
-              <a:rPr sz="1600"/>
+              <a:rPr sz="1600">
+                <a:latin typeface="Calibri"/>
+              </a:rPr>
               <a:t>Training the model and interpreting coefficients</a:t>
             </a:r>
           </a:p>
           <a:p>
             <a:r>
-              <a:rPr sz="1600"/>
+              <a:rPr sz="1600">
+                <a:latin typeface="Calibri"/>
+              </a:rPr>
               <a:t>Probabilities vs hard labels - predict_proba()</a:t>
             </a:r>
           </a:p>
           <a:p>
             <a:r>
-              <a:rPr sz="1600"/>
+              <a:rPr sz="1600">
+                <a:latin typeface="Calibri"/>
+              </a:rPr>
               <a:t>Threshold tuning - balancing precision and recall</a:t>
             </a:r>
           </a:p>
@@ -9449,6 +9631,9 @@
           <a:lstStyle/>
           <a:p>
             <a:r>
+              <a:rPr b="1">
+                <a:latin typeface="Calibri"/>
+              </a:rPr>
               <a:t>What We'll Cover</a:t>
             </a:r>
           </a:p>
@@ -9488,6 +9673,9 @@
           <a:lstStyle/>
           <a:p>
             <a:r>
+              <a:rPr>
+                <a:latin typeface="Calibri"/>
+              </a:rPr>
               <a:t>Next:  Lesson 1.4 - Decision Trees</a:t>
             </a:r>
           </a:p>
@@ -9509,6 +9697,9 @@
           <a:lstStyle/>
           <a:p>
             <a:r>
+              <a:rPr b="1">
+                <a:latin typeface="Calibri"/>
+              </a:rPr>
               <a:t>Logistic Regression</a:t>
             </a:r>
           </a:p>
@@ -9548,11 +9739,17 @@
           <a:lstStyle/>
           <a:p>
             <a:r>
+              <a:rPr b="1">
+                <a:latin typeface="Calibri"/>
+              </a:rPr>
               <a:t>From Numbers</a:t>
             </a:r>
           </a:p>
           <a:p>
             <a:r>
+              <a:rPr b="1">
+                <a:latin typeface="Calibri"/>
+              </a:rPr>
               <a:t>to Decisions</a:t>
             </a:r>
           </a:p>
@@ -9574,6 +9771,9 @@
           <a:lstStyle/>
           <a:p>
             <a:r>
+              <a:rPr b="1">
+                <a:latin typeface="Calibri"/>
+              </a:rPr>
               <a:t>01</a:t>
             </a:r>
           </a:p>
@@ -9613,6 +9813,9 @@
           <a:lstStyle/>
           <a:p>
             <a:r>
+              <a:rPr b="1">
+                <a:latin typeface="Calibri"/>
+              </a:rPr>
               <a:t>Linear vs Logistic Regression</a:t>
             </a:r>
           </a:p>
@@ -9634,55 +9837,73 @@
           <a:lstStyle/>
           <a:p>
             <a:r>
-              <a:rPr sz="1400"/>
+              <a:rPr sz="1400">
+                <a:latin typeface="Calibri"/>
+              </a:rPr>
               <a:t>Linear Regression</a:t>
             </a:r>
           </a:p>
           <a:p>
             <a:r>
-              <a:rPr sz="1400"/>
+              <a:rPr sz="1400">
+                <a:latin typeface="Calibri"/>
+              </a:rPr>
               <a:t/>
             </a:r>
           </a:p>
           <a:p>
             <a:r>
-              <a:rPr sz="1400"/>
+              <a:rPr sz="1400">
+                <a:latin typeface="Calibri"/>
+              </a:rPr>
               <a:t>Predicts a number:</a:t>
             </a:r>
           </a:p>
           <a:p>
             <a:r>
-              <a:rPr sz="1400"/>
+              <a:rPr sz="1400">
+                <a:latin typeface="Calibri"/>
+              </a:rPr>
               <a:t>  Response time = 247.3 ms</a:t>
             </a:r>
           </a:p>
           <a:p>
             <a:r>
-              <a:rPr sz="1400"/>
+              <a:rPr sz="1400">
+                <a:latin typeface="Calibri"/>
+              </a:rPr>
               <a:t/>
             </a:r>
           </a:p>
           <a:p>
             <a:r>
-              <a:rPr sz="1400"/>
+              <a:rPr sz="1400">
+                <a:latin typeface="Calibri"/>
+              </a:rPr>
               <a:t>Output range: any number</a:t>
             </a:r>
           </a:p>
           <a:p>
             <a:r>
-              <a:rPr sz="1400"/>
+              <a:rPr sz="1400">
+                <a:latin typeface="Calibri"/>
+              </a:rPr>
               <a:t/>
             </a:r>
           </a:p>
           <a:p>
             <a:r>
-              <a:rPr sz="1400"/>
+              <a:rPr sz="1400">
+                <a:latin typeface="Calibri"/>
+              </a:rPr>
               <a:t>Use case:</a:t>
             </a:r>
           </a:p>
           <a:p>
             <a:r>
-              <a:rPr sz="1400"/>
+              <a:rPr sz="1400">
+                <a:latin typeface="Calibri"/>
+              </a:rPr>
               <a:t>  'How much response time?'</a:t>
             </a:r>
           </a:p>
@@ -9704,55 +9925,73 @@
           <a:lstStyle/>
           <a:p>
             <a:r>
-              <a:rPr sz="1400"/>
+              <a:rPr sz="1400">
+                <a:latin typeface="Calibri"/>
+              </a:rPr>
               <a:t>Logistic Regression</a:t>
             </a:r>
           </a:p>
           <a:p>
             <a:r>
-              <a:rPr sz="1400"/>
+              <a:rPr sz="1400">
+                <a:latin typeface="Calibri"/>
+              </a:rPr>
               <a:t/>
             </a:r>
           </a:p>
           <a:p>
             <a:r>
-              <a:rPr sz="1400"/>
+              <a:rPr sz="1400">
+                <a:latin typeface="Calibri"/>
+              </a:rPr>
               <a:t>Predicts a probability:</a:t>
             </a:r>
           </a:p>
           <a:p>
             <a:r>
-              <a:rPr sz="1400"/>
+              <a:rPr sz="1400">
+                <a:latin typeface="Calibri"/>
+              </a:rPr>
               <a:t>  P(phishing) = 0.87</a:t>
             </a:r>
           </a:p>
           <a:p>
             <a:r>
-              <a:rPr sz="1400"/>
+              <a:rPr sz="1400">
+                <a:latin typeface="Calibri"/>
+              </a:rPr>
               <a:t/>
             </a:r>
           </a:p>
           <a:p>
             <a:r>
-              <a:rPr sz="1400"/>
+              <a:rPr sz="1400">
+                <a:latin typeface="Calibri"/>
+              </a:rPr>
               <a:t>Output range: 0 to 1</a:t>
             </a:r>
           </a:p>
           <a:p>
             <a:r>
-              <a:rPr sz="1400"/>
+              <a:rPr sz="1400">
+                <a:latin typeface="Calibri"/>
+              </a:rPr>
               <a:t/>
             </a:r>
           </a:p>
           <a:p>
             <a:r>
-              <a:rPr sz="1400"/>
+              <a:rPr sz="1400">
+                <a:latin typeface="Calibri"/>
+              </a:rPr>
               <a:t>Use case:</a:t>
             </a:r>
           </a:p>
           <a:p>
             <a:r>
-              <a:rPr sz="1400"/>
+              <a:rPr sz="1400">
+                <a:latin typeface="Calibri"/>
+              </a:rPr>
               <a:t>  'Is this URL phishing?'</a:t>
             </a:r>
           </a:p>
@@ -9792,6 +10031,9 @@
           <a:lstStyle/>
           <a:p>
             <a:r>
+              <a:rPr b="1">
+                <a:latin typeface="Calibri"/>
+              </a:rPr>
               <a:t>The Sigmoid Function - Squashing Scores into Probabilities</a:t>
             </a:r>
           </a:p>
@@ -9855,11 +10097,17 @@
           <a:lstStyle/>
           <a:p>
             <a:r>
+              <a:rPr b="1">
+                <a:latin typeface="Calibri"/>
+              </a:rPr>
               <a:t>Phishing URL</a:t>
             </a:r>
           </a:p>
           <a:p>
             <a:r>
+              <a:rPr b="1">
+                <a:latin typeface="Calibri"/>
+              </a:rPr>
               <a:t>Feature Engineering</a:t>
             </a:r>
           </a:p>
@@ -9881,6 +10129,9 @@
           <a:lstStyle/>
           <a:p>
             <a:r>
+              <a:rPr b="1">
+                <a:latin typeface="Calibri"/>
+              </a:rPr>
               <a:t>02</a:t>
             </a:r>
           </a:p>
@@ -9920,6 +10171,9 @@
           <a:lstStyle/>
           <a:p>
             <a:r>
+              <a:rPr b="1">
+                <a:latin typeface="Calibri"/>
+              </a:rPr>
               <a:t>Six Signals Extracted from Every URL</a:t>
             </a:r>
           </a:p>
@@ -9983,6 +10237,9 @@
           <a:lstStyle/>
           <a:p>
             <a:r>
+              <a:rPr>
+                <a:latin typeface="Calibri"/>
+              </a:rPr>
               <a:t/>
             </a:r>
           </a:p>
@@ -10004,37 +10261,49 @@
           <a:lstStyle/>
           <a:p>
             <a:r>
-              <a:rPr sz="1400"/>
+              <a:rPr sz="1400">
+                <a:latin typeface="Calibri"/>
+              </a:rPr>
               <a:t>Feature engineering is where</a:t>
             </a:r>
           </a:p>
           <a:p>
             <a:r>
-              <a:rPr sz="1400"/>
+              <a:rPr sz="1400">
+                <a:latin typeface="Calibri"/>
+              </a:rPr>
               <a:t>domain expertise matters most.</a:t>
             </a:r>
           </a:p>
           <a:p>
             <a:r>
-              <a:rPr sz="1400"/>
+              <a:rPr sz="1400">
+                <a:latin typeface="Calibri"/>
+              </a:rPr>
               <a:t/>
             </a:r>
           </a:p>
           <a:p>
             <a:r>
-              <a:rPr sz="1400"/>
+              <a:rPr sz="1400">
+                <a:latin typeface="Calibri"/>
+              </a:rPr>
               <a:t>A security analyst knows which</a:t>
             </a:r>
           </a:p>
           <a:p>
             <a:r>
-              <a:rPr sz="1400"/>
+              <a:rPr sz="1400">
+                <a:latin typeface="Calibri"/>
+              </a:rPr>
               <a:t>URL patterns are suspicious -</a:t>
             </a:r>
           </a:p>
           <a:p>
             <a:r>
-              <a:rPr sz="1400"/>
+              <a:rPr sz="1400">
+                <a:latin typeface="Calibri"/>
+              </a:rPr>
               <a:t>the model just quantifies it.</a:t>
             </a:r>
           </a:p>
@@ -10056,6 +10325,9 @@
           <a:lstStyle/>
           <a:p>
             <a:r>
+              <a:rPr b="1">
+                <a:latin typeface="Calibri"/>
+              </a:rPr>
               <a:t>Feature Engineering for Security</a:t>
             </a:r>
           </a:p>
@@ -10077,49 +10349,65 @@
           <a:lstStyle/>
           <a:p>
             <a:r>
-              <a:rPr sz="1400"/>
+              <a:rPr sz="1400">
+                <a:latin typeface="Calibri"/>
+              </a:rPr>
               <a:t>Every URL becomes a row of numbers:</a:t>
             </a:r>
           </a:p>
           <a:p>
             <a:r>
-              <a:rPr sz="1400"/>
+              <a:rPr sz="1400">
+                <a:latin typeface="Calibri"/>
+              </a:rPr>
               <a:t>  [92, 5, 1, 1, 3, 0]</a:t>
             </a:r>
           </a:p>
           <a:p>
             <a:r>
-              <a:rPr sz="1400"/>
+              <a:rPr sz="1400">
+                <a:latin typeface="Calibri"/>
+              </a:rPr>
               <a:t/>
             </a:r>
           </a:p>
           <a:p>
             <a:r>
-              <a:rPr sz="1400"/>
+              <a:rPr sz="1400">
+                <a:latin typeface="Calibri"/>
+              </a:rPr>
               <a:t>The model never sees the raw URL</a:t>
             </a:r>
           </a:p>
           <a:p>
             <a:r>
-              <a:rPr sz="1400"/>
+              <a:rPr sz="1400">
+                <a:latin typeface="Calibri"/>
+              </a:rPr>
               <a:t>  - only the extracted features</a:t>
             </a:r>
           </a:p>
           <a:p>
             <a:r>
-              <a:rPr sz="1400"/>
+              <a:rPr sz="1400">
+                <a:latin typeface="Calibri"/>
+              </a:rPr>
               <a:t/>
             </a:r>
           </a:p>
           <a:p>
             <a:r>
-              <a:rPr sz="1400"/>
+              <a:rPr sz="1400">
+                <a:latin typeface="Calibri"/>
+              </a:rPr>
               <a:t>Feature quality determines model</a:t>
             </a:r>
           </a:p>
           <a:p>
             <a:r>
-              <a:rPr sz="1400"/>
+              <a:rPr sz="1400">
+                <a:latin typeface="Calibri"/>
+              </a:rPr>
               <a:t>quality - garbage in, garbage out</a:t>
             </a:r>
           </a:p>
@@ -10159,11 +10447,17 @@
           <a:lstStyle/>
           <a:p>
             <a:r>
+              <a:rPr b="1">
+                <a:latin typeface="Calibri"/>
+              </a:rPr>
               <a:t>Training the Model</a:t>
             </a:r>
           </a:p>
           <a:p>
             <a:r>
+              <a:rPr b="1">
+                <a:latin typeface="Calibri"/>
+              </a:rPr>
               <a:t>and Reading Results</a:t>
             </a:r>
           </a:p>
@@ -10185,6 +10479,9 @@
           <a:lstStyle/>
           <a:p>
             <a:r>
+              <a:rPr b="1">
+                <a:latin typeface="Calibri"/>
+              </a:rPr>
               <a:t>03</a:t>
             </a:r>
           </a:p>
